--- a/report/2026_06_28_competitive_report_no_limit.pptx
+++ b/report/2026_06_28_competitive_report_no_limit.pptx
@@ -7,11 +7,6 @@
   <p:sldIdLst>
     <p:sldId id="256" r:id="rId7"/>
     <p:sldId id="257" r:id="rId8"/>
-    <p:sldId id="258" r:id="rId9"/>
-    <p:sldId id="259" r:id="rId10"/>
-    <p:sldId id="260" r:id="rId11"/>
-    <p:sldId id="261" r:id="rId12"/>
-    <p:sldId id="262" r:id="rId13"/>
   </p:sldIdLst>
   <p:sldSz cx="12188952" cy="6858000" type="screen4x3"/>
   <p:notesSz cx="6858000" cy="9144000"/>
@@ -3200,7 +3195,7 @@
               </a:defRPr>
             </a:pPr>
             <a:r>
-              <a:t>a) 【結論】</a:t>
+              <a:t>周辺環境の更新情報について</a:t>
             </a:r>
           </a:p>
         </p:txBody>
@@ -3213,8 +3208,8 @@
         </p:nvSpPr>
         <p:spPr>
           <a:xfrm>
-            <a:off x="685800" y="1371600"/>
-            <a:ext cx="10817352" cy="4572000"/>
+            <a:off x="685800" y="2286000"/>
+            <a:ext cx="10817352" cy="2743200"/>
           </a:xfrm>
           <a:prstGeom prst="rect">
             <a:avLst/>
@@ -3227,1036 +3222,19 @@
           </a:bodyPr>
           <a:lstStyle/>
           <a:p>
-            <a:pPr>
-              <a:spcAft>
-                <a:spcPts val="1600"/>
-              </a:spcAft>
-              <a:defRPr sz="1800">
+            <a:pPr algn="ctr">
+              <a:defRPr sz="2000">
                 <a:solidFill>
                   <a:srgbClr val="1E1E1E"/>
                 </a:solidFill>
               </a:defRPr>
             </a:pPr>
             <a:r>
-              <a:t>・ 2026年06月28日時点の調査では、関西エリアのスーパーマーケット市場において、以下の競合動向が新たに確認されました。</a:t>
-            </a:r>
-          </a:p>
-          <a:p>
-            <a:pPr>
-              <a:spcAft>
-                <a:spcPts val="1600"/>
-              </a:spcAft>
-              <a:defRPr sz="1800">
-                <a:solidFill>
-                  <a:srgbClr val="1E1E1E"/>
-                </a:solidFill>
-              </a:defRPr>
-            </a:pPr>
-            <a:r>
-              <a:t>・   **関西スーパー「西郷店」のリニューアルオープン:*神戸市兵庫区に位置する関西スーパー西郷店が、2026年7月3日(金)にリニューアルオープンします。いかりスーパー神戸三宮店にとって中程度の競合圧力となる可能性があります。</a:t>
-            </a:r>
-          </a:p>
-          <a:p>
-            <a:pPr>
-              <a:spcAft>
-                <a:spcPts val="1600"/>
-              </a:spcAft>
-              <a:defRPr sz="1800">
-                <a:solidFill>
-                  <a:srgbClr val="1E1E1E"/>
-                </a:solidFill>
-              </a:defRPr>
-            </a:pPr>
-            <a:r>
-              <a:t>・   **ライフ「遠里小野店」の新規出店計画:*大阪市住吉区にて「ライフ遠里小野店」が2026年夏頃に新規オープン予定です。いかりスーパー南海なんば店をはじめとする大阪府内の店舗に対し、新たな競合となる可能性があります。</a:t>
-            </a:r>
-          </a:p>
-        </p:txBody>
-      </p:sp>
-    </p:spTree>
-  </p:cSld>
-  <p:clrMapOvr>
-    <a:masterClrMapping/>
-  </p:clrMapOvr>
-</p:sld>
-</file>
-
-<file path=ppt/slides/slide3.xml><?xml version="1.0" encoding="utf-8"?>
-<p:sld xmlns:a="http://schemas.openxmlformats.org/drawingml/2006/main" xmlns:p="http://schemas.openxmlformats.org/presentationml/2006/main" xmlns:r="http://schemas.openxmlformats.org/officeDocument/2006/relationships">
-  <p:cSld>
-    <p:spTree>
-      <p:nvGrpSpPr>
-        <p:cNvPr id="1" name=""/>
-        <p:cNvGrpSpPr/>
-        <p:nvPr/>
-      </p:nvGrpSpPr>
-      <p:grpSpPr/>
-      <p:sp>
-        <p:nvSpPr>
-          <p:cNvPr id="2" name="TextBox 1"/>
-          <p:cNvSpPr txBox="1"/>
-          <p:nvPr/>
-        </p:nvSpPr>
-        <p:spPr>
-          <a:xfrm>
-            <a:off x="685800" y="457200"/>
-            <a:ext cx="10817352" cy="731520"/>
-          </a:xfrm>
-          <a:prstGeom prst="rect">
-            <a:avLst/>
-          </a:prstGeom>
-          <a:noFill/>
-        </p:spPr>
-        <p:txBody>
-          <a:bodyPr wrap="square">
-            <a:spAutoFit/>
-          </a:bodyPr>
-          <a:lstStyle/>
-          <a:p>
-            <a:pPr>
-              <a:defRPr b="1" sz="2800">
-                <a:solidFill>
-                  <a:srgbClr val="005BAC"/>
-                </a:solidFill>
-              </a:defRPr>
-            </a:pPr>
-            <a:r>
-              <a:t>b) 【詳細】 (1ページ目)</a:t>
-            </a:r>
-          </a:p>
-        </p:txBody>
-      </p:sp>
-      <p:graphicFrame>
-        <p:nvGraphicFramePr>
-          <p:cNvPr id="3" name="Table 2"/>
-          <p:cNvGraphicFramePr>
-            <a:graphicFrameLocks noGrp="1"/>
-          </p:cNvGraphicFramePr>
-          <p:nvPr/>
-        </p:nvGraphicFramePr>
-        <p:xfrm>
-          <a:off x="685800" y="1280160"/>
-          <a:ext cx="10817352" cy="4754880"/>
-        </p:xfrm>
-        <a:graphic>
-          <a:graphicData uri="http://schemas.openxmlformats.org/drawingml/2006/table">
-            <a:tbl>
-              <a:tblPr firstRow="1" bandRow="1">
-                <a:tableStyleId>{5C22544A-7EE6-4342-B048-85BDC9FD1C3A}</a:tableStyleId>
-              </a:tblPr>
-              <a:tblGrid>
-                <a:gridCol w="914400"/>
-                <a:gridCol w="1645920"/>
-                <a:gridCol w="914400"/>
-                <a:gridCol w="914400"/>
-                <a:gridCol w="1371600"/>
-                <a:gridCol w="914400"/>
-                <a:gridCol w="4142232"/>
-              </a:tblGrid>
-              <a:tr h="1584960">
-                <a:tc>
-                  <a:txBody>
-                    <a:bodyPr/>
-                    <a:lstStyle/>
-                    <a:p>
-                      <a:pPr algn="ctr">
-                        <a:defRPr b="1" sz="1100">
-                          <a:solidFill>
-                            <a:srgbClr val="FFFFFF"/>
-                          </a:solidFill>
-                        </a:defRPr>
-                      </a:pPr>
-                      <a:r>
-                        <a:t>エリア</a:t>
-                      </a:r>
-                    </a:p>
-                  </a:txBody>
-                  <a:tcPr>
-                    <a:solidFill>
-                      <a:srgbClr val="005BAC"/>
-                    </a:solidFill>
-                  </a:tcPr>
-                </a:tc>
-                <a:tc>
-                  <a:txBody>
-                    <a:bodyPr/>
-                    <a:lstStyle/>
-                    <a:p>
-                      <a:pPr algn="ctr">
-                        <a:defRPr b="1" sz="1100">
-                          <a:solidFill>
-                            <a:srgbClr val="FFFFFF"/>
-                          </a:solidFill>
-                        </a:defRPr>
-                      </a:pPr>
-                      <a:r>
-                        <a:t>競合店舗名</a:t>
-                      </a:r>
-                    </a:p>
-                  </a:txBody>
-                  <a:tcPr>
-                    <a:solidFill>
-                      <a:srgbClr val="005BAC"/>
-                    </a:solidFill>
-                  </a:tcPr>
-                </a:tc>
-                <a:tc>
-                  <a:txBody>
-                    <a:bodyPr/>
-                    <a:lstStyle/>
-                    <a:p>
-                      <a:pPr algn="ctr">
-                        <a:defRPr b="1" sz="1100">
-                          <a:solidFill>
-                            <a:srgbClr val="FFFFFF"/>
-                          </a:solidFill>
-                        </a:defRPr>
-                      </a:pPr>
-                      <a:r>
-                        <a:t>時期</a:t>
-                      </a:r>
-                    </a:p>
-                  </a:txBody>
-                  <a:tcPr>
-                    <a:solidFill>
-                      <a:srgbClr val="005BAC"/>
-                    </a:solidFill>
-                  </a:tcPr>
-                </a:tc>
-                <a:tc>
-                  <a:txBody>
-                    <a:bodyPr/>
-                    <a:lstStyle/>
-                    <a:p>
-                      <a:pPr algn="ctr">
-                        <a:defRPr b="1" sz="1100">
-                          <a:solidFill>
-                            <a:srgbClr val="FFFFFF"/>
-                          </a:solidFill>
-                        </a:defRPr>
-                      </a:pPr>
-                      <a:r>
-                        <a:t>状態</a:t>
-                      </a:r>
-                    </a:p>
-                  </a:txBody>
-                  <a:tcPr>
-                    <a:solidFill>
-                      <a:srgbClr val="005BAC"/>
-                    </a:solidFill>
-                  </a:tcPr>
-                </a:tc>
-                <a:tc>
-                  <a:txBody>
-                    <a:bodyPr/>
-                    <a:lstStyle/>
-                    <a:p>
-                      <a:pPr algn="ctr">
-                        <a:defRPr b="1" sz="1100">
-                          <a:solidFill>
-                            <a:srgbClr val="FFFFFF"/>
-                          </a:solidFill>
-                        </a:defRPr>
-                      </a:pPr>
-                      <a:r>
-                        <a:t>影響店舗</a:t>
-                      </a:r>
-                    </a:p>
-                  </a:txBody>
-                  <a:tcPr>
-                    <a:solidFill>
-                      <a:srgbClr val="005BAC"/>
-                    </a:solidFill>
-                  </a:tcPr>
-                </a:tc>
-                <a:tc>
-                  <a:txBody>
-                    <a:bodyPr/>
-                    <a:lstStyle/>
-                    <a:p>
-                      <a:pPr algn="ctr">
-                        <a:defRPr b="1" sz="1100">
-                          <a:solidFill>
-                            <a:srgbClr val="FFFFFF"/>
-                          </a:solidFill>
-                        </a:defRPr>
-                      </a:pPr>
-                      <a:r>
-                        <a:t>影響レベル</a:t>
-                      </a:r>
-                    </a:p>
-                  </a:txBody>
-                  <a:tcPr>
-                    <a:solidFill>
-                      <a:srgbClr val="005BAC"/>
-                    </a:solidFill>
-                  </a:tcPr>
-                </a:tc>
-                <a:tc>
-                  <a:txBody>
-                    <a:bodyPr/>
-                    <a:lstStyle/>
-                    <a:p>
-                      <a:pPr algn="ctr">
-                        <a:defRPr b="1" sz="1100">
-                          <a:solidFill>
-                            <a:srgbClr val="FFFFFF"/>
-                          </a:solidFill>
-                        </a:defRPr>
-                      </a:pPr>
-                      <a:r>
-                        <a:t>詳細説明</a:t>
-                      </a:r>
-                    </a:p>
-                  </a:txBody>
-                  <a:tcPr>
-                    <a:solidFill>
-                      <a:srgbClr val="005BAC"/>
-                    </a:solidFill>
-                  </a:tcPr>
-                </a:tc>
-              </a:tr>
-              <a:tr h="1584960">
-                <a:tc>
-                  <a:txBody>
-                    <a:bodyPr/>
-                    <a:lstStyle/>
-                    <a:p>
-                      <a:pPr>
-                        <a:defRPr sz="950">
-                          <a:solidFill>
-                            <a:srgbClr val="1E1E1E"/>
-                          </a:solidFill>
-                        </a:defRPr>
-                      </a:pPr>
-                      <a:r>
-                        <a:t>兵庫県神戸市</a:t>
-                      </a:r>
-                    </a:p>
-                  </a:txBody>
-                  <a:tcPr>
-                    <a:solidFill>
-                      <a:srgbClr val="F5F5F5"/>
-                    </a:solidFill>
-                  </a:tcPr>
-                </a:tc>
-                <a:tc>
-                  <a:txBody>
-                    <a:bodyPr/>
-                    <a:lstStyle/>
-                    <a:p>
-                      <a:pPr>
-                        <a:defRPr sz="950">
-                          <a:solidFill>
-                            <a:srgbClr val="1E1E1E"/>
-                          </a:solidFill>
-                        </a:defRPr>
-                      </a:pPr>
-                      <a:r>
-                        <a:t>関西スーパー 西郷店</a:t>
-                      </a:r>
-                    </a:p>
-                  </a:txBody>
-                  <a:tcPr>
-                    <a:solidFill>
-                      <a:srgbClr val="F5F5F5"/>
-                    </a:solidFill>
-                  </a:tcPr>
-                </a:tc>
-                <a:tc>
-                  <a:txBody>
-                    <a:bodyPr/>
-                    <a:lstStyle/>
-                    <a:p>
-                      <a:pPr>
-                        <a:defRPr sz="950">
-                          <a:solidFill>
-                            <a:srgbClr val="1E1E1E"/>
-                          </a:solidFill>
-                        </a:defRPr>
-                      </a:pPr>
-                      <a:r>
-                        <a:t>2026年7月3日(金)</a:t>
-                      </a:r>
-                    </a:p>
-                  </a:txBody>
-                  <a:tcPr>
-                    <a:solidFill>
-                      <a:srgbClr val="F5F5F5"/>
-                    </a:solidFill>
-                  </a:tcPr>
-                </a:tc>
-                <a:tc>
-                  <a:txBody>
-                    <a:bodyPr/>
-                    <a:lstStyle/>
-                    <a:p>
-                      <a:pPr>
-                        <a:defRPr sz="950">
-                          <a:solidFill>
-                            <a:srgbClr val="1E1E1E"/>
-                          </a:solidFill>
-                        </a:defRPr>
-                      </a:pPr>
-                      <a:r>
-                        <a:t>リニューアルオープン</a:t>
-                      </a:r>
-                    </a:p>
-                  </a:txBody>
-                  <a:tcPr>
-                    <a:solidFill>
-                      <a:srgbClr val="F5F5F5"/>
-                    </a:solidFill>
-                  </a:tcPr>
-                </a:tc>
-                <a:tc>
-                  <a:txBody>
-                    <a:bodyPr/>
-                    <a:lstStyle/>
-                    <a:p>
-                      <a:pPr>
-                        <a:defRPr sz="950">
-                          <a:solidFill>
-                            <a:srgbClr val="1E1E1E"/>
-                          </a:solidFill>
-                        </a:defRPr>
-                      </a:pPr>
-                      <a:r>
-                        <a:t>神戸三宮店、六甲店、御影店</a:t>
-                      </a:r>
-                    </a:p>
-                  </a:txBody>
-                  <a:tcPr>
-                    <a:solidFill>
-                      <a:srgbClr val="F5F5F5"/>
-                    </a:solidFill>
-                  </a:tcPr>
-                </a:tc>
-                <a:tc>
-                  <a:txBody>
-                    <a:bodyPr/>
-                    <a:lstStyle/>
-                    <a:p>
-                      <a:pPr>
-                        <a:defRPr sz="950">
-                          <a:solidFill>
-                            <a:srgbClr val="1E1E1E"/>
-                          </a:solidFill>
-                        </a:defRPr>
-                      </a:pPr>
-                      <a:r>
-                        <a:t>中</a:t>
-                      </a:r>
-                    </a:p>
-                  </a:txBody>
-                  <a:tcPr>
-                    <a:solidFill>
-                      <a:srgbClr val="F5F5F5"/>
-                    </a:solidFill>
-                  </a:tcPr>
-                </a:tc>
-                <a:tc>
-                  <a:txBody>
-                    <a:bodyPr/>
-                    <a:lstStyle/>
-                    <a:p>
-                      <a:pPr>
-                        <a:defRPr sz="950">
-                          <a:solidFill>
-                            <a:srgbClr val="1E1E1E"/>
-                          </a:solidFill>
-                        </a:defRPr>
-                      </a:pPr>
-                      <a:r>
-                        <a:t>神戸市兵庫区にある「関西スーパー西郷店」がリニューアルオープン。いかりスーパー神戸三宮店から直線距離で約2.5km圏内に位置しており、神戸市中央区から兵庫区にかけての顧客層に対する競合が激化する可能性があります。</a:t>
-                      </a:r>
-                    </a:p>
-                  </a:txBody>
-                  <a:tcPr>
-                    <a:solidFill>
-                      <a:srgbClr val="F5F5F5"/>
-                    </a:solidFill>
-                  </a:tcPr>
-                </a:tc>
-              </a:tr>
-              <a:tr h="1584960">
-                <a:tc>
-                  <a:txBody>
-                    <a:bodyPr/>
-                    <a:lstStyle/>
-                    <a:p>
-                      <a:pPr>
-                        <a:defRPr sz="950">
-                          <a:solidFill>
-                            <a:srgbClr val="1E1E1E"/>
-                          </a:solidFill>
-                        </a:defRPr>
-                      </a:pPr>
-                      <a:r>
-                        <a:t>大阪府大阪市住吉区</a:t>
-                      </a:r>
-                    </a:p>
-                  </a:txBody>
-                  <a:tcPr/>
-                </a:tc>
-                <a:tc>
-                  <a:txBody>
-                    <a:bodyPr/>
-                    <a:lstStyle/>
-                    <a:p>
-                      <a:pPr>
-                        <a:defRPr sz="950">
-                          <a:solidFill>
-                            <a:srgbClr val="1E1E1E"/>
-                          </a:solidFill>
-                        </a:defRPr>
-                      </a:pPr>
-                      <a:r>
-                        <a:t>ライフ 遠里小野店</a:t>
-                      </a:r>
-                    </a:p>
-                  </a:txBody>
-                  <a:tcPr/>
-                </a:tc>
-                <a:tc>
-                  <a:txBody>
-                    <a:bodyPr/>
-                    <a:lstStyle/>
-                    <a:p>
-                      <a:pPr>
-                        <a:defRPr sz="950">
-                          <a:solidFill>
-                            <a:srgbClr val="1E1E1E"/>
-                          </a:solidFill>
-                        </a:defRPr>
-                      </a:pPr>
-                      <a:r>
-                        <a:t>2026年夏頃</a:t>
-                      </a:r>
-                    </a:p>
-                  </a:txBody>
-                  <a:tcPr/>
-                </a:tc>
-                <a:tc>
-                  <a:txBody>
-                    <a:bodyPr/>
-                    <a:lstStyle/>
-                    <a:p>
-                      <a:pPr>
-                        <a:defRPr sz="950">
-                          <a:solidFill>
-                            <a:srgbClr val="1E1E1E"/>
-                          </a:solidFill>
-                        </a:defRPr>
-                      </a:pPr>
-                      <a:r>
-                        <a:t>新規出店予定</a:t>
-                      </a:r>
-                    </a:p>
-                  </a:txBody>
-                  <a:tcPr/>
-                </a:tc>
-                <a:tc>
-                  <a:txBody>
-                    <a:bodyPr/>
-                    <a:lstStyle/>
-                    <a:p>
-                      <a:pPr>
-                        <a:defRPr sz="950">
-                          <a:solidFill>
-                            <a:srgbClr val="1E1E1E"/>
-                          </a:solidFill>
-                        </a:defRPr>
-                      </a:pPr>
-                      <a:r>
-                        <a:t>南海なんば店、JR大阪店、豊中店、豊中緑丘店</a:t>
-                      </a:r>
-                    </a:p>
-                  </a:txBody>
-                  <a:tcPr/>
-                </a:tc>
-                <a:tc>
-                  <a:txBody>
-                    <a:bodyPr/>
-                    <a:lstStyle/>
-                    <a:p>
-                      <a:pPr>
-                        <a:defRPr sz="950">
-                          <a:solidFill>
-                            <a:srgbClr val="1E1E1E"/>
-                          </a:solidFill>
-                        </a:defRPr>
-                      </a:pPr>
-                      <a:r>
-                        <a:t>小〜中</a:t>
-                      </a:r>
-                    </a:p>
-                  </a:txBody>
-                  <a:tcPr/>
-                </a:tc>
-                <a:tc>
-                  <a:txBody>
-                    <a:bodyPr/>
-                    <a:lstStyle/>
-                    <a:p>
-                      <a:pPr>
-                        <a:defRPr sz="950">
-                          <a:solidFill>
-                            <a:srgbClr val="1E1E1E"/>
-                          </a:solidFill>
-                        </a:defRPr>
-                      </a:pPr>
-                      <a:r>
-                        <a:t>大阪市住吉区に「ライフ遠里小野店」が2026年夏頃のオープンを予定しており、新規スタッフの募集を開始しています。いかりスーパー南海なんば店など、大阪市内のいかりスーパー店舗に対する顧客獲得競争が発生する可能性があります。</a:t>
-                      </a:r>
-                    </a:p>
-                  </a:txBody>
-                  <a:tcPr/>
-                </a:tc>
-              </a:tr>
-            </a:tbl>
-          </a:graphicData>
-        </a:graphic>
-      </p:graphicFrame>
-    </p:spTree>
-  </p:cSld>
-  <p:clrMapOvr>
-    <a:masterClrMapping/>
-  </p:clrMapOvr>
-</p:sld>
-</file>
-
-<file path=ppt/slides/slide4.xml><?xml version="1.0" encoding="utf-8"?>
-<p:sld xmlns:a="http://schemas.openxmlformats.org/drawingml/2006/main" xmlns:p="http://schemas.openxmlformats.org/presentationml/2006/main" xmlns:r="http://schemas.openxmlformats.org/officeDocument/2006/relationships">
-  <p:cSld>
-    <p:spTree>
-      <p:nvGrpSpPr>
-        <p:cNvPr id="1" name=""/>
-        <p:cNvGrpSpPr/>
-        <p:nvPr/>
-      </p:nvGrpSpPr>
-      <p:grpSpPr/>
-      <p:sp>
-        <p:nvSpPr>
-          <p:cNvPr id="2" name="TextBox 1"/>
-          <p:cNvSpPr txBox="1"/>
-          <p:nvPr/>
-        </p:nvSpPr>
-        <p:spPr>
-          <a:xfrm>
-            <a:off x="685800" y="457200"/>
-            <a:ext cx="10817352" cy="731520"/>
-          </a:xfrm>
-          <a:prstGeom prst="rect">
-            <a:avLst/>
-          </a:prstGeom>
-          <a:noFill/>
-        </p:spPr>
-        <p:txBody>
-          <a:bodyPr wrap="square">
-            <a:spAutoFit/>
-          </a:bodyPr>
-          <a:lstStyle/>
-          <a:p>
-            <a:pPr>
-              <a:defRPr b="1" sz="2800">
-                <a:solidFill>
-                  <a:srgbClr val="005BAC"/>
-                </a:solidFill>
-              </a:defRPr>
-            </a:pPr>
-            <a:r>
-              <a:t>c) 【地図的分析】</a:t>
-            </a:r>
-          </a:p>
-        </p:txBody>
-      </p:sp>
-      <p:sp>
-        <p:nvSpPr>
-          <p:cNvPr id="3" name="TextBox 2"/>
-          <p:cNvSpPr txBox="1"/>
-          <p:nvPr/>
-        </p:nvSpPr>
-        <p:spPr>
-          <a:xfrm>
-            <a:off x="685800" y="1280160"/>
-            <a:ext cx="10817352" cy="4846320"/>
-          </a:xfrm>
-          <a:prstGeom prst="rect">
-            <a:avLst/>
-          </a:prstGeom>
-          <a:noFill/>
-        </p:spPr>
-        <p:txBody>
-          <a:bodyPr wrap="square">
-            <a:spAutoFit/>
-          </a:bodyPr>
-          <a:lstStyle/>
-          <a:p>
-            <a:pPr>
-              <a:spcAft>
-                <a:spcPts val="1400"/>
-              </a:spcAft>
-              <a:defRPr sz="1400">
-                <a:solidFill>
-                  <a:srgbClr val="1E1E1E"/>
-                </a:solidFill>
-              </a:defRPr>
-            </a:pPr>
-            <a:r>
-              <a:t>今回リニューアルオープンする関西スーパー西郷店（神戸市兵庫区）は、いかりスーパー神戸三宮店から北西に約2.5km、六甲店から約3.5km、御影店から約5kmの距離に位置し、神戸市内の主要顧客層に対する選択肢を増やす動きと捉えられます。</a:t>
-            </a:r>
-            <a:br/>
-            <a:r>
-              <a:t>新たに新規出店が予定されているライフ遠里小野店は、大阪市住吉区に位置します。いかりスーパー南海なんば店（大阪市中央区難波）から数km圏内にあり、直接的な商圏の一部が重なる可能性があります。ライフは広範な商品を取り扱う地域密着型スーパーとして知られており、近隣住民の日常的な買い物ニーズに応えることで、間接的に周辺のいかりスーパー店舗の顧客行動に影響を与える可能性があります。</a:t>
-            </a:r>
-          </a:p>
-        </p:txBody>
-      </p:sp>
-    </p:spTree>
-  </p:cSld>
-  <p:clrMapOvr>
-    <a:masterClrMapping/>
-  </p:clrMapOvr>
-</p:sld>
-</file>
-
-<file path=ppt/slides/slide5.xml><?xml version="1.0" encoding="utf-8"?>
-<p:sld xmlns:a="http://schemas.openxmlformats.org/drawingml/2006/main" xmlns:p="http://schemas.openxmlformats.org/presentationml/2006/main" xmlns:r="http://schemas.openxmlformats.org/officeDocument/2006/relationships">
-  <p:cSld>
-    <p:spTree>
-      <p:nvGrpSpPr>
-        <p:cNvPr id="1" name=""/>
-        <p:cNvGrpSpPr/>
-        <p:nvPr/>
-      </p:nvGrpSpPr>
-      <p:grpSpPr/>
-      <p:sp>
-        <p:nvSpPr>
-          <p:cNvPr id="2" name="TextBox 1"/>
-          <p:cNvSpPr txBox="1"/>
-          <p:nvPr/>
-        </p:nvSpPr>
-        <p:spPr>
-          <a:xfrm>
-            <a:off x="685800" y="457200"/>
-            <a:ext cx="10817352" cy="731520"/>
-          </a:xfrm>
-          <a:prstGeom prst="rect">
-            <a:avLst/>
-          </a:prstGeom>
-          <a:noFill/>
-        </p:spPr>
-        <p:txBody>
-          <a:bodyPr wrap="square">
-            <a:spAutoFit/>
-          </a:bodyPr>
-          <a:lstStyle/>
-          <a:p>
-            <a:pPr>
-              <a:defRPr b="1" sz="2800">
-                <a:solidFill>
-                  <a:srgbClr val="005BAC"/>
-                </a:solidFill>
-              </a:defRPr>
-            </a:pPr>
-            <a:r>
-              <a:t>d) 【影響分析】</a:t>
-            </a:r>
-          </a:p>
-        </p:txBody>
-      </p:sp>
-      <p:sp>
-        <p:nvSpPr>
-          <p:cNvPr id="3" name="TextBox 2"/>
-          <p:cNvSpPr txBox="1"/>
-          <p:nvPr/>
-        </p:nvSpPr>
-        <p:spPr>
-          <a:xfrm>
-            <a:off x="685800" y="1280160"/>
-            <a:ext cx="10817352" cy="4846320"/>
-          </a:xfrm>
-          <a:prstGeom prst="rect">
-            <a:avLst/>
-          </a:prstGeom>
-          <a:noFill/>
-        </p:spPr>
-        <p:txBody>
-          <a:bodyPr wrap="square">
-            <a:spAutoFit/>
-          </a:bodyPr>
-          <a:lstStyle/>
-          <a:p>
-            <a:pPr>
-              <a:spcAft>
-                <a:spcPts val="1200"/>
-              </a:spcAft>
-              <a:defRPr sz="1350">
-                <a:solidFill>
-                  <a:srgbClr val="1E1E1E"/>
-                </a:solidFill>
-              </a:defRPr>
-            </a:pPr>
-            <a:r>
-              <a:t>関西スーパー西郷店のリニューアルオープンは、いかりスーパー神戸三宮店に対し、引き続き中程度の直接的影響を与える可能性があります。関西スーパーがリニューアルによって品揃えやサービスを向上させた場合、一部の顧客層（特に日常使いを重視する層）がいかりスーパーから流出するリスクも考えられます。いかりスーパーとしては、引き続き高品質な商品ラインナップと独自のサービスで差別化を図る必要があります。</a:t>
-            </a:r>
-            <a:br/>
-            <a:r>
-              <a:t>ライフ遠里小野店の新規出店は、大阪市南部のいかりスーパー店舗、特に南海なんば店に対し、間接的な影響を与える可能性があります。ライフは価格競争力と幅広い品揃えを持つスーパーであり、いかりスーパーの高級志向とはターゲット層が異なります。しかし、新規出店により地域のスーパーマーケットの選択肢が増え、消費者の購買行動が分散する可能性は考慮すべきです。いかりスーパーは、ライフのような広範なスーパーとは異なる、独自の価値提案（高品質な食材、希少な輸入品、手作りデリなど）をさらに強化し、顧客ロイヤルティを高める戦略が重要となるでしょう。</a:t>
-            </a:r>
-          </a:p>
-        </p:txBody>
-      </p:sp>
-    </p:spTree>
-  </p:cSld>
-  <p:clrMapOvr>
-    <a:masterClrMapping/>
-  </p:clrMapOvr>
-</p:sld>
-</file>
-
-<file path=ppt/slides/slide6.xml><?xml version="1.0" encoding="utf-8"?>
-<p:sld xmlns:a="http://schemas.openxmlformats.org/drawingml/2006/main" xmlns:p="http://schemas.openxmlformats.org/presentationml/2006/main" xmlns:r="http://schemas.openxmlformats.org/officeDocument/2006/relationships">
-  <p:cSld>
-    <p:spTree>
-      <p:nvGrpSpPr>
-        <p:cNvPr id="1" name=""/>
-        <p:cNvGrpSpPr/>
-        <p:nvPr/>
-      </p:nvGrpSpPr>
-      <p:grpSpPr/>
-      <p:sp>
-        <p:nvSpPr>
-          <p:cNvPr id="2" name="TextBox 1"/>
-          <p:cNvSpPr txBox="1"/>
-          <p:nvPr/>
-        </p:nvSpPr>
-        <p:spPr>
-          <a:xfrm>
-            <a:off x="685800" y="457200"/>
-            <a:ext cx="10817352" cy="731520"/>
-          </a:xfrm>
-          <a:prstGeom prst="rect">
-            <a:avLst/>
-          </a:prstGeom>
-          <a:noFill/>
-        </p:spPr>
-        <p:txBody>
-          <a:bodyPr wrap="square">
-            <a:spAutoFit/>
-          </a:bodyPr>
-          <a:lstStyle/>
-          <a:p>
-            <a:pPr>
-              <a:defRPr b="1" sz="2800">
-                <a:solidFill>
-                  <a:srgbClr val="005BAC"/>
-                </a:solidFill>
-              </a:defRPr>
-            </a:pPr>
-            <a:r>
-              <a:t>e) 【参照ソース】</a:t>
-            </a:r>
-          </a:p>
-        </p:txBody>
-      </p:sp>
-      <p:sp>
-        <p:nvSpPr>
-          <p:cNvPr id="3" name="TextBox 2"/>
-          <p:cNvSpPr txBox="1"/>
-          <p:nvPr/>
-        </p:nvSpPr>
-        <p:spPr>
-          <a:xfrm>
-            <a:off x="685800" y="1280160"/>
-            <a:ext cx="10817352" cy="4846320"/>
-          </a:xfrm>
-          <a:prstGeom prst="rect">
-            <a:avLst/>
-          </a:prstGeom>
-          <a:noFill/>
-        </p:spPr>
-        <p:txBody>
-          <a:bodyPr wrap="square">
-            <a:spAutoFit/>
-          </a:bodyPr>
-          <a:lstStyle/>
-          <a:p>
-            <a:pPr>
-              <a:spcAft>
-                <a:spcPts val="800"/>
-              </a:spcAft>
-            </a:pPr>
-            <a:r>
-              <a:rPr sz="1200">
-                <a:solidFill>
-                  <a:srgbClr val="1E1E1E"/>
-                </a:solidFill>
-              </a:rPr>
-              <a:t>・ </a:t>
-            </a:r>
-            <a:r>
-              <a:rPr sz="1200">
-                <a:solidFill>
-                  <a:srgbClr val="1E1E1E"/>
-                </a:solidFill>
-              </a:rPr>
-              <a:t>  </a:t>
-            </a:r>
-            <a:r>
-              <a:rPr sz="1200" u="sng">
-                <a:solidFill>
-                  <a:srgbClr val="0066CC"/>
-                </a:solidFill>
-                <a:hlinkClick r:id="rId2"/>
-              </a:rPr>
-              <a:t>お知らせ｜関西スーパー～いつも暮らしの近くにいます～​</a:t>
-            </a:r>
-          </a:p>
-          <a:p>
-            <a:pPr>
-              <a:spcAft>
-                <a:spcPts val="800"/>
-              </a:spcAft>
-            </a:pPr>
-            <a:r>
-              <a:rPr sz="1200">
-                <a:solidFill>
-                  <a:srgbClr val="1E1E1E"/>
-                </a:solidFill>
-              </a:rPr>
-              <a:t>・ </a:t>
-            </a:r>
-            <a:r>
-              <a:rPr sz="1200">
-                <a:solidFill>
-                  <a:srgbClr val="1E1E1E"/>
-                </a:solidFill>
-              </a:rPr>
-              <a:t>  </a:t>
-            </a:r>
-            <a:r>
-              <a:rPr sz="1200" u="sng">
-                <a:solidFill>
-                  <a:srgbClr val="0066CC"/>
-                </a:solidFill>
-                <a:hlinkClick r:id="rId3"/>
-              </a:rPr>
-              <a:t>関西スーパー～いつも暮らしの近くにいます～</a:t>
-            </a:r>
-          </a:p>
-          <a:p>
-            <a:pPr>
-              <a:spcAft>
-                <a:spcPts val="800"/>
-              </a:spcAft>
-            </a:pPr>
-            <a:r>
-              <a:rPr sz="1200">
-                <a:solidFill>
-                  <a:srgbClr val="1E1E1E"/>
-                </a:solidFill>
-              </a:rPr>
-              <a:t>・ </a:t>
-            </a:r>
-            <a:r>
-              <a:rPr sz="1200">
-                <a:solidFill>
-                  <a:srgbClr val="1E1E1E"/>
-                </a:solidFill>
-              </a:rPr>
-              <a:t>  </a:t>
-            </a:r>
-            <a:r>
-              <a:rPr sz="1200" u="sng">
-                <a:solidFill>
-                  <a:srgbClr val="0066CC"/>
-                </a:solidFill>
-                <a:hlinkClick r:id="rId4"/>
-              </a:rPr>
-              <a:t>ライフ遠里小野店（2026年夏頃OPEN予定）</a:t>
-            </a:r>
-          </a:p>
-        </p:txBody>
-      </p:sp>
-    </p:spTree>
-  </p:cSld>
-  <p:clrMapOvr>
-    <a:masterClrMapping/>
-  </p:clrMapOvr>
-</p:sld>
-</file>
-
-<file path=ppt/slides/slide7.xml><?xml version="1.0" encoding="utf-8"?>
-<p:sld xmlns:a="http://schemas.openxmlformats.org/drawingml/2006/main" xmlns:p="http://schemas.openxmlformats.org/presentationml/2006/main" xmlns:r="http://schemas.openxmlformats.org/officeDocument/2006/relationships">
-  <p:cSld>
-    <p:spTree>
-      <p:nvGrpSpPr>
-        <p:cNvPr id="1" name=""/>
-        <p:cNvGrpSpPr/>
-        <p:nvPr/>
-      </p:nvGrpSpPr>
-      <p:grpSpPr/>
-      <p:sp>
-        <p:nvSpPr>
-          <p:cNvPr id="2" name="TextBox 1"/>
-          <p:cNvSpPr txBox="1"/>
-          <p:nvPr/>
-        </p:nvSpPr>
-        <p:spPr>
-          <a:xfrm>
-            <a:off x="685800" y="457200"/>
-            <a:ext cx="10817352" cy="731520"/>
-          </a:xfrm>
-          <a:prstGeom prst="rect">
-            <a:avLst/>
-          </a:prstGeom>
-          <a:noFill/>
-        </p:spPr>
-        <p:txBody>
-          <a:bodyPr wrap="square">
-            <a:spAutoFit/>
-          </a:bodyPr>
-          <a:lstStyle/>
-          <a:p>
-            <a:pPr>
-              <a:defRPr b="1" sz="2800">
-                <a:solidFill>
-                  <a:srgbClr val="005BAC"/>
-                </a:solidFill>
-              </a:defRPr>
-            </a:pPr>
-            <a:r>
-              <a:t>f) 【ビジュアルマップ】</a:t>
-            </a:r>
-          </a:p>
-        </p:txBody>
-      </p:sp>
-      <p:pic>
-        <p:nvPicPr>
-          <p:cNvPr id="3" name="Picture 2" descr="2026_06_28_competitive_map_no_limit.png"/>
-          <p:cNvPicPr>
-            <a:picLocks noChangeAspect="1"/>
-          </p:cNvPicPr>
-          <p:nvPr/>
-        </p:nvPicPr>
-        <p:blipFill>
-          <a:blip r:embed="rId2"/>
-          <a:stretch>
-            <a:fillRect/>
-          </a:stretch>
-        </p:blipFill>
-        <p:spPr>
-          <a:xfrm>
-            <a:off x="3483864" y="1188720"/>
-            <a:ext cx="5212080" cy="5212080"/>
-          </a:xfrm>
-          <a:prstGeom prst="rect">
-            <a:avLst/>
-          </a:prstGeom>
-        </p:spPr>
-      </p:pic>
+              <a:t>本日の調査において、前日からの周辺環境（競合の新規出店・改装計画・その他動向）の更新情報はありませんでした。</a:t>
+            </a:r>
+          </a:p>
+        </p:txBody>
+      </p:sp>
     </p:spTree>
   </p:cSld>
   <p:clrMapOvr>

--- a/report/2026_06_28_competitive_report_no_limit.pptx
+++ b/report/2026_06_28_competitive_report_no_limit.pptx
@@ -7,6 +7,11 @@
   <p:sldIdLst>
     <p:sldId id="256" r:id="rId7"/>
     <p:sldId id="257" r:id="rId8"/>
+    <p:sldId id="258" r:id="rId9"/>
+    <p:sldId id="259" r:id="rId10"/>
+    <p:sldId id="260" r:id="rId11"/>
+    <p:sldId id="261" r:id="rId12"/>
+    <p:sldId id="262" r:id="rId13"/>
   </p:sldIdLst>
   <p:sldSz cx="12188952" cy="6858000" type="screen4x3"/>
   <p:notesSz cx="6858000" cy="9144000"/>
@@ -3195,7 +3200,7 @@
               </a:defRPr>
             </a:pPr>
             <a:r>
-              <a:t>周辺環境の更新情報について</a:t>
+              <a:t>a) 【結論】</a:t>
             </a:r>
           </a:p>
         </p:txBody>
@@ -3208,8 +3213,8 @@
         </p:nvSpPr>
         <p:spPr>
           <a:xfrm>
-            <a:off x="685800" y="2286000"/>
-            <a:ext cx="10817352" cy="2743200"/>
+            <a:off x="685800" y="1371600"/>
+            <a:ext cx="10817352" cy="4572000"/>
           </a:xfrm>
           <a:prstGeom prst="rect">
             <a:avLst/>
@@ -3222,19 +3227,1326 @@
           </a:bodyPr>
           <a:lstStyle/>
           <a:p>
-            <a:pPr algn="ctr">
-              <a:defRPr sz="2000">
+            <a:pPr>
+              <a:spcAft>
+                <a:spcPts val="1600"/>
+              </a:spcAft>
+              <a:defRPr sz="1800">
                 <a:solidFill>
                   <a:srgbClr val="1E1E1E"/>
                 </a:solidFill>
               </a:defRPr>
             </a:pPr>
             <a:r>
-              <a:t>本日の調査において、前日からの周辺環境（競合の新規出店・改装計画・その他動向）の更新情報はありませんでした。</a:t>
-            </a:r>
-          </a:p>
-        </p:txBody>
-      </p:sp>
+              <a:t>・ 調査日以降の関西エリアのスーパーマーケット市場においては、既存競合の刷新と新たな出店計画が複数確認されました。特に、いかりスーパーの主要商圏である神戸市東灘区での有力競合のリニューアル、大阪市中心部での新規出店、そして兵庫県北摂エリアでの新業態店の展開が挙げられます。これにより、いかりスーパーは既存店舗の顧客維持に加え、新たな顧客層へのアプローチ戦略を再検討する必要があると考えられます。</a:t>
+            </a:r>
+          </a:p>
+          <a:p>
+            <a:pPr>
+              <a:spcAft>
+                <a:spcPts val="1600"/>
+              </a:spcAft>
+              <a:defRPr sz="1800">
+                <a:solidFill>
+                  <a:srgbClr val="1E1E1E"/>
+                </a:solidFill>
+              </a:defRPr>
+            </a:pPr>
+            <a:r>
+              <a:t>・   神戸市東灘区において、ライフ本山店が2026年秋に大規模リニューアルを予定しており、いかり岡本店、御影店、摂津本山駅前店への直接的な競合圧力が強化されます。</a:t>
+            </a:r>
+          </a:p>
+          <a:p>
+            <a:pPr>
+              <a:spcAft>
+                <a:spcPts val="1600"/>
+              </a:spcAft>
+              <a:defRPr sz="1800">
+                <a:solidFill>
+                  <a:srgbClr val="1E1E1E"/>
+                </a:solidFill>
+              </a:defRPr>
+            </a:pPr>
+            <a:r>
+              <a:t>・   大阪市中央区では、万代が2027年春頃の新規店舗オープンを目指しており、南海なんば店、JR大阪店といった都心部のいかり店舗の商圏に影響を与える可能性があります。</a:t>
+            </a:r>
+          </a:p>
+          <a:p>
+            <a:pPr>
+              <a:spcAft>
+                <a:spcPts val="1600"/>
+              </a:spcAft>
+              <a:defRPr sz="1800">
+                <a:solidFill>
+                  <a:srgbClr val="1E1E1E"/>
+                </a:solidFill>
+              </a:defRPr>
+            </a:pPr>
+            <a:r>
+              <a:t>・   兵庫県川西市には、食品館アプロが2027年初夏に新業態店を開店予定で、体験型サービスを重視する新たな競争軸が持ち込まれ、周辺のいかり店舗（宝塚店、阪急逆瀬川店、阪急伊丹店、箕面店）に影響が及ぶ可能性があります。</a:t>
+            </a:r>
+          </a:p>
+          <a:p>
+            <a:pPr>
+              <a:spcAft>
+                <a:spcPts val="1600"/>
+              </a:spcAft>
+              <a:defRPr sz="1800">
+                <a:solidFill>
+                  <a:srgbClr val="1E1E1E"/>
+                </a:solidFill>
+              </a:defRPr>
+            </a:pPr>
+            <a:r>
+              <a:t>・   これらの動きは、既存顧客層の囲い込み強化、新たな客層の獲得、そして「食体験」の価値提供という多角的な側面から、いかりスーパー全体への競争環境を厳しくすると考えられます。</a:t>
+            </a:r>
+          </a:p>
+        </p:txBody>
+      </p:sp>
+    </p:spTree>
+  </p:cSld>
+  <p:clrMapOvr>
+    <a:masterClrMapping/>
+  </p:clrMapOvr>
+</p:sld>
+</file>
+
+<file path=ppt/slides/slide3.xml><?xml version="1.0" encoding="utf-8"?>
+<p:sld xmlns:a="http://schemas.openxmlformats.org/drawingml/2006/main" xmlns:p="http://schemas.openxmlformats.org/presentationml/2006/main" xmlns:r="http://schemas.openxmlformats.org/officeDocument/2006/relationships">
+  <p:cSld>
+    <p:spTree>
+      <p:nvGrpSpPr>
+        <p:cNvPr id="1" name=""/>
+        <p:cNvGrpSpPr/>
+        <p:nvPr/>
+      </p:nvGrpSpPr>
+      <p:grpSpPr/>
+      <p:sp>
+        <p:nvSpPr>
+          <p:cNvPr id="2" name="TextBox 1"/>
+          <p:cNvSpPr txBox="1"/>
+          <p:nvPr/>
+        </p:nvSpPr>
+        <p:spPr>
+          <a:xfrm>
+            <a:off x="685800" y="457200"/>
+            <a:ext cx="10817352" cy="731520"/>
+          </a:xfrm>
+          <a:prstGeom prst="rect">
+            <a:avLst/>
+          </a:prstGeom>
+          <a:noFill/>
+        </p:spPr>
+        <p:txBody>
+          <a:bodyPr wrap="square">
+            <a:spAutoFit/>
+          </a:bodyPr>
+          <a:lstStyle/>
+          <a:p>
+            <a:pPr>
+              <a:defRPr b="1" sz="2800">
+                <a:solidFill>
+                  <a:srgbClr val="005BAC"/>
+                </a:solidFill>
+              </a:defRPr>
+            </a:pPr>
+            <a:r>
+              <a:t>b) 【詳細】 (1ページ目)</a:t>
+            </a:r>
+          </a:p>
+        </p:txBody>
+      </p:sp>
+      <p:graphicFrame>
+        <p:nvGraphicFramePr>
+          <p:cNvPr id="3" name="Table 2"/>
+          <p:cNvGraphicFramePr>
+            <a:graphicFrameLocks noGrp="1"/>
+          </p:cNvGraphicFramePr>
+          <p:nvPr/>
+        </p:nvGraphicFramePr>
+        <p:xfrm>
+          <a:off x="685800" y="1280160"/>
+          <a:ext cx="10817352" cy="4754880"/>
+        </p:xfrm>
+        <a:graphic>
+          <a:graphicData uri="http://schemas.openxmlformats.org/drawingml/2006/table">
+            <a:tbl>
+              <a:tblPr firstRow="1" bandRow="1">
+                <a:tableStyleId>{5C22544A-7EE6-4342-B048-85BDC9FD1C3A}</a:tableStyleId>
+              </a:tblPr>
+              <a:tblGrid>
+                <a:gridCol w="914400"/>
+                <a:gridCol w="1645920"/>
+                <a:gridCol w="914400"/>
+                <a:gridCol w="914400"/>
+                <a:gridCol w="1371600"/>
+                <a:gridCol w="914400"/>
+                <a:gridCol w="4142232"/>
+              </a:tblGrid>
+              <a:tr h="1188720">
+                <a:tc>
+                  <a:txBody>
+                    <a:bodyPr/>
+                    <a:lstStyle/>
+                    <a:p>
+                      <a:pPr algn="ctr">
+                        <a:defRPr b="1" sz="1100">
+                          <a:solidFill>
+                            <a:srgbClr val="FFFFFF"/>
+                          </a:solidFill>
+                        </a:defRPr>
+                      </a:pPr>
+                      <a:r>
+                        <a:t>エリア</a:t>
+                      </a:r>
+                    </a:p>
+                  </a:txBody>
+                  <a:tcPr>
+                    <a:solidFill>
+                      <a:srgbClr val="005BAC"/>
+                    </a:solidFill>
+                  </a:tcPr>
+                </a:tc>
+                <a:tc>
+                  <a:txBody>
+                    <a:bodyPr/>
+                    <a:lstStyle/>
+                    <a:p>
+                      <a:pPr algn="ctr">
+                        <a:defRPr b="1" sz="1100">
+                          <a:solidFill>
+                            <a:srgbClr val="FFFFFF"/>
+                          </a:solidFill>
+                        </a:defRPr>
+                      </a:pPr>
+                      <a:r>
+                        <a:t>競合店舗名</a:t>
+                      </a:r>
+                    </a:p>
+                  </a:txBody>
+                  <a:tcPr>
+                    <a:solidFill>
+                      <a:srgbClr val="005BAC"/>
+                    </a:solidFill>
+                  </a:tcPr>
+                </a:tc>
+                <a:tc>
+                  <a:txBody>
+                    <a:bodyPr/>
+                    <a:lstStyle/>
+                    <a:p>
+                      <a:pPr algn="ctr">
+                        <a:defRPr b="1" sz="1100">
+                          <a:solidFill>
+                            <a:srgbClr val="FFFFFF"/>
+                          </a:solidFill>
+                        </a:defRPr>
+                      </a:pPr>
+                      <a:r>
+                        <a:t>時期</a:t>
+                      </a:r>
+                    </a:p>
+                  </a:txBody>
+                  <a:tcPr>
+                    <a:solidFill>
+                      <a:srgbClr val="005BAC"/>
+                    </a:solidFill>
+                  </a:tcPr>
+                </a:tc>
+                <a:tc>
+                  <a:txBody>
+                    <a:bodyPr/>
+                    <a:lstStyle/>
+                    <a:p>
+                      <a:pPr algn="ctr">
+                        <a:defRPr b="1" sz="1100">
+                          <a:solidFill>
+                            <a:srgbClr val="FFFFFF"/>
+                          </a:solidFill>
+                        </a:defRPr>
+                      </a:pPr>
+                      <a:r>
+                        <a:t>状態</a:t>
+                      </a:r>
+                    </a:p>
+                  </a:txBody>
+                  <a:tcPr>
+                    <a:solidFill>
+                      <a:srgbClr val="005BAC"/>
+                    </a:solidFill>
+                  </a:tcPr>
+                </a:tc>
+                <a:tc>
+                  <a:txBody>
+                    <a:bodyPr/>
+                    <a:lstStyle/>
+                    <a:p>
+                      <a:pPr algn="ctr">
+                        <a:defRPr b="1" sz="1100">
+                          <a:solidFill>
+                            <a:srgbClr val="FFFFFF"/>
+                          </a:solidFill>
+                        </a:defRPr>
+                      </a:pPr>
+                      <a:r>
+                        <a:t>影響店舗</a:t>
+                      </a:r>
+                    </a:p>
+                  </a:txBody>
+                  <a:tcPr>
+                    <a:solidFill>
+                      <a:srgbClr val="005BAC"/>
+                    </a:solidFill>
+                  </a:tcPr>
+                </a:tc>
+                <a:tc>
+                  <a:txBody>
+                    <a:bodyPr/>
+                    <a:lstStyle/>
+                    <a:p>
+                      <a:pPr algn="ctr">
+                        <a:defRPr b="1" sz="1100">
+                          <a:solidFill>
+                            <a:srgbClr val="FFFFFF"/>
+                          </a:solidFill>
+                        </a:defRPr>
+                      </a:pPr>
+                      <a:r>
+                        <a:t>影響レベル</a:t>
+                      </a:r>
+                    </a:p>
+                  </a:txBody>
+                  <a:tcPr>
+                    <a:solidFill>
+                      <a:srgbClr val="005BAC"/>
+                    </a:solidFill>
+                  </a:tcPr>
+                </a:tc>
+                <a:tc>
+                  <a:txBody>
+                    <a:bodyPr/>
+                    <a:lstStyle/>
+                    <a:p>
+                      <a:pPr algn="ctr">
+                        <a:defRPr b="1" sz="1100">
+                          <a:solidFill>
+                            <a:srgbClr val="FFFFFF"/>
+                          </a:solidFill>
+                        </a:defRPr>
+                      </a:pPr>
+                      <a:r>
+                        <a:t>詳細説明</a:t>
+                      </a:r>
+                    </a:p>
+                  </a:txBody>
+                  <a:tcPr>
+                    <a:solidFill>
+                      <a:srgbClr val="005BAC"/>
+                    </a:solidFill>
+                  </a:tcPr>
+                </a:tc>
+              </a:tr>
+              <a:tr h="1188720">
+                <a:tc>
+                  <a:txBody>
+                    <a:bodyPr/>
+                    <a:lstStyle/>
+                    <a:p>
+                      <a:pPr>
+                        <a:defRPr sz="950">
+                          <a:solidFill>
+                            <a:srgbClr val="1E1E1E"/>
+                          </a:solidFill>
+                        </a:defRPr>
+                      </a:pPr>
+                      <a:r>
+                        <a:t>兵庫県神戸市東灘区</a:t>
+                      </a:r>
+                    </a:p>
+                  </a:txBody>
+                  <a:tcPr>
+                    <a:solidFill>
+                      <a:srgbClr val="F5F5F5"/>
+                    </a:solidFill>
+                  </a:tcPr>
+                </a:tc>
+                <a:tc>
+                  <a:txBody>
+                    <a:bodyPr/>
+                    <a:lstStyle/>
+                    <a:p>
+                      <a:pPr>
+                        <a:defRPr sz="950">
+                          <a:solidFill>
+                            <a:srgbClr val="1E1E1E"/>
+                          </a:solidFill>
+                        </a:defRPr>
+                      </a:pPr>
+                      <a:r>
+                        <a:t>ライフ本山店</a:t>
+                      </a:r>
+                    </a:p>
+                  </a:txBody>
+                  <a:tcPr>
+                    <a:solidFill>
+                      <a:srgbClr val="F5F5F5"/>
+                    </a:solidFill>
+                  </a:tcPr>
+                </a:tc>
+                <a:tc>
+                  <a:txBody>
+                    <a:bodyPr/>
+                    <a:lstStyle/>
+                    <a:p>
+                      <a:pPr>
+                        <a:defRPr sz="950">
+                          <a:solidFill>
+                            <a:srgbClr val="1E1E1E"/>
+                          </a:solidFill>
+                        </a:defRPr>
+                      </a:pPr>
+                      <a:r>
+                        <a:t>2026年秋（10月上旬予定）</a:t>
+                      </a:r>
+                    </a:p>
+                  </a:txBody>
+                  <a:tcPr>
+                    <a:solidFill>
+                      <a:srgbClr val="F5F5F5"/>
+                    </a:solidFill>
+                  </a:tcPr>
+                </a:tc>
+                <a:tc>
+                  <a:txBody>
+                    <a:bodyPr/>
+                    <a:lstStyle/>
+                    <a:p>
+                      <a:pPr>
+                        <a:defRPr sz="950">
+                          <a:solidFill>
+                            <a:srgbClr val="1E1E1E"/>
+                          </a:solidFill>
+                        </a:defRPr>
+                      </a:pPr>
+                      <a:r>
+                        <a:t>大規模改装、リニューアルオープン</a:t>
+                      </a:r>
+                    </a:p>
+                  </a:txBody>
+                  <a:tcPr>
+                    <a:solidFill>
+                      <a:srgbClr val="F5F5F5"/>
+                    </a:solidFill>
+                  </a:tcPr>
+                </a:tc>
+                <a:tc>
+                  <a:txBody>
+                    <a:bodyPr/>
+                    <a:lstStyle/>
+                    <a:p>
+                      <a:pPr>
+                        <a:defRPr sz="950">
+                          <a:solidFill>
+                            <a:srgbClr val="1E1E1E"/>
+                          </a:solidFill>
+                        </a:defRPr>
+                      </a:pPr>
+                      <a:r>
+                        <a:t>岡本店, 御影店, 摂津本山駅前店</a:t>
+                      </a:r>
+                    </a:p>
+                  </a:txBody>
+                  <a:tcPr>
+                    <a:solidFill>
+                      <a:srgbClr val="F5F5F5"/>
+                    </a:solidFill>
+                  </a:tcPr>
+                </a:tc>
+                <a:tc>
+                  <a:txBody>
+                    <a:bodyPr/>
+                    <a:lstStyle/>
+                    <a:p>
+                      <a:pPr>
+                        <a:defRPr sz="950">
+                          <a:solidFill>
+                            <a:srgbClr val="1E1E1E"/>
+                          </a:solidFill>
+                        </a:defRPr>
+                      </a:pPr>
+                      <a:r>
+                        <a:t>高</a:t>
+                      </a:r>
+                    </a:p>
+                  </a:txBody>
+                  <a:tcPr>
+                    <a:solidFill>
+                      <a:srgbClr val="F5F5F5"/>
+                    </a:solidFill>
+                  </a:tcPr>
+                </a:tc>
+                <a:tc>
+                  <a:txBody>
+                    <a:bodyPr/>
+                    <a:lstStyle/>
+                    <a:p>
+                      <a:pPr>
+                        <a:defRPr sz="950">
+                          <a:solidFill>
+                            <a:srgbClr val="1E1E1E"/>
+                          </a:solidFill>
+                        </a:defRPr>
+                      </a:pPr>
+                      <a:r>
+                        <a:t>生鮮食品の品揃え強化やデリバリーサービスの拡充を図り、地域顧客ニーズに応える。いかりの主要商圏である東灘区での競争が激化。</a:t>
+                      </a:r>
+                    </a:p>
+                  </a:txBody>
+                  <a:tcPr>
+                    <a:solidFill>
+                      <a:srgbClr val="F5F5F5"/>
+                    </a:solidFill>
+                  </a:tcPr>
+                </a:tc>
+              </a:tr>
+              <a:tr h="1188720">
+                <a:tc>
+                  <a:txBody>
+                    <a:bodyPr/>
+                    <a:lstStyle/>
+                    <a:p>
+                      <a:pPr>
+                        <a:defRPr sz="950">
+                          <a:solidFill>
+                            <a:srgbClr val="1E1E1E"/>
+                          </a:solidFill>
+                        </a:defRPr>
+                      </a:pPr>
+                      <a:r>
+                        <a:t>大阪府大阪市中央区</a:t>
+                      </a:r>
+                    </a:p>
+                  </a:txBody>
+                  <a:tcPr/>
+                </a:tc>
+                <a:tc>
+                  <a:txBody>
+                    <a:bodyPr/>
+                    <a:lstStyle/>
+                    <a:p>
+                      <a:pPr>
+                        <a:defRPr sz="950">
+                          <a:solidFill>
+                            <a:srgbClr val="1E1E1E"/>
+                          </a:solidFill>
+                        </a:defRPr>
+                      </a:pPr>
+                      <a:r>
+                        <a:t>万代（新規店舗）</a:t>
+                      </a:r>
+                    </a:p>
+                  </a:txBody>
+                  <a:tcPr/>
+                </a:tc>
+                <a:tc>
+                  <a:txBody>
+                    <a:bodyPr/>
+                    <a:lstStyle/>
+                    <a:p>
+                      <a:pPr>
+                        <a:defRPr sz="950">
+                          <a:solidFill>
+                            <a:srgbClr val="1E1E1E"/>
+                          </a:solidFill>
+                        </a:defRPr>
+                      </a:pPr>
+                      <a:r>
+                        <a:t>2027年3月頃予定</a:t>
+                      </a:r>
+                    </a:p>
+                  </a:txBody>
+                  <a:tcPr/>
+                </a:tc>
+                <a:tc>
+                  <a:txBody>
+                    <a:bodyPr/>
+                    <a:lstStyle/>
+                    <a:p>
+                      <a:pPr>
+                        <a:defRPr sz="950">
+                          <a:solidFill>
+                            <a:srgbClr val="1E1E1E"/>
+                          </a:solidFill>
+                        </a:defRPr>
+                      </a:pPr>
+                      <a:r>
+                        <a:t>新規出店計画</a:t>
+                      </a:r>
+                    </a:p>
+                  </a:txBody>
+                  <a:tcPr/>
+                </a:tc>
+                <a:tc>
+                  <a:txBody>
+                    <a:bodyPr/>
+                    <a:lstStyle/>
+                    <a:p>
+                      <a:pPr>
+                        <a:defRPr sz="950">
+                          <a:solidFill>
+                            <a:srgbClr val="1E1E1E"/>
+                          </a:solidFill>
+                        </a:defRPr>
+                      </a:pPr>
+                      <a:r>
+                        <a:t>南海なんば店, JR大阪店</a:t>
+                      </a:r>
+                    </a:p>
+                  </a:txBody>
+                  <a:tcPr/>
+                </a:tc>
+                <a:tc>
+                  <a:txBody>
+                    <a:bodyPr/>
+                    <a:lstStyle/>
+                    <a:p>
+                      <a:pPr>
+                        <a:defRPr sz="950">
+                          <a:solidFill>
+                            <a:srgbClr val="1E1E1E"/>
+                          </a:solidFill>
+                        </a:defRPr>
+                      </a:pPr>
+                      <a:r>
+                        <a:t>中～高</a:t>
+                      </a:r>
+                    </a:p>
+                  </a:txBody>
+                  <a:tcPr/>
+                </a:tc>
+                <a:tc>
+                  <a:txBody>
+                    <a:bodyPr/>
+                    <a:lstStyle/>
+                    <a:p>
+                      <a:pPr>
+                        <a:defRPr sz="950">
+                          <a:solidFill>
+                            <a:srgbClr val="1E1E1E"/>
+                          </a:solidFill>
+                        </a:defRPr>
+                      </a:pPr>
+                      <a:r>
+                        <a:t>大阪市中央区に新規店舗を出店し、既存のスーパーが少ないエリアでの展開を検討。都心部での新たな顧客層獲得を目指す。</a:t>
+                      </a:r>
+                    </a:p>
+                  </a:txBody>
+                  <a:tcPr/>
+                </a:tc>
+              </a:tr>
+              <a:tr h="1188720">
+                <a:tc>
+                  <a:txBody>
+                    <a:bodyPr/>
+                    <a:lstStyle/>
+                    <a:p>
+                      <a:pPr>
+                        <a:defRPr sz="950">
+                          <a:solidFill>
+                            <a:srgbClr val="1E1E1E"/>
+                          </a:solidFill>
+                        </a:defRPr>
+                      </a:pPr>
+                      <a:r>
+                        <a:t>兵庫県川西市</a:t>
+                      </a:r>
+                    </a:p>
+                  </a:txBody>
+                  <a:tcPr>
+                    <a:solidFill>
+                      <a:srgbClr val="F5F5F5"/>
+                    </a:solidFill>
+                  </a:tcPr>
+                </a:tc>
+                <a:tc>
+                  <a:txBody>
+                    <a:bodyPr/>
+                    <a:lstStyle/>
+                    <a:p>
+                      <a:pPr>
+                        <a:defRPr sz="950">
+                          <a:solidFill>
+                            <a:srgbClr val="1E1E1E"/>
+                          </a:solidFill>
+                        </a:defRPr>
+                      </a:pPr>
+                      <a:r>
+                        <a:t>食品館アプロ（新業態店）</a:t>
+                      </a:r>
+                    </a:p>
+                  </a:txBody>
+                  <a:tcPr>
+                    <a:solidFill>
+                      <a:srgbClr val="F5F5F5"/>
+                    </a:solidFill>
+                  </a:tcPr>
+                </a:tc>
+                <a:tc>
+                  <a:txBody>
+                    <a:bodyPr/>
+                    <a:lstStyle/>
+                    <a:p>
+                      <a:pPr>
+                        <a:defRPr sz="950">
+                          <a:solidFill>
+                            <a:srgbClr val="1E1E1E"/>
+                          </a:solidFill>
+                        </a:defRPr>
+                      </a:pPr>
+                      <a:r>
+                        <a:t>2027年初夏予定</a:t>
+                      </a:r>
+                    </a:p>
+                  </a:txBody>
+                  <a:tcPr>
+                    <a:solidFill>
+                      <a:srgbClr val="F5F5F5"/>
+                    </a:solidFill>
+                  </a:tcPr>
+                </a:tc>
+                <a:tc>
+                  <a:txBody>
+                    <a:bodyPr/>
+                    <a:lstStyle/>
+                    <a:p>
+                      <a:pPr>
+                        <a:defRPr sz="950">
+                          <a:solidFill>
+                            <a:srgbClr val="1E1E1E"/>
+                          </a:solidFill>
+                        </a:defRPr>
+                      </a:pPr>
+                      <a:r>
+                        <a:t>新業態店オープン計画</a:t>
+                      </a:r>
+                    </a:p>
+                  </a:txBody>
+                  <a:tcPr>
+                    <a:solidFill>
+                      <a:srgbClr val="F5F5F5"/>
+                    </a:solidFill>
+                  </a:tcPr>
+                </a:tc>
+                <a:tc>
+                  <a:txBody>
+                    <a:bodyPr/>
+                    <a:lstStyle/>
+                    <a:p>
+                      <a:pPr>
+                        <a:defRPr sz="950">
+                          <a:solidFill>
+                            <a:srgbClr val="1E1E1E"/>
+                          </a:solidFill>
+                        </a:defRPr>
+                      </a:pPr>
+                      <a:r>
+                        <a:t>宝塚店, 阪急逆瀬川店, 阪急伊丹店, 箕面店</a:t>
+                      </a:r>
+                    </a:p>
+                  </a:txBody>
+                  <a:tcPr>
+                    <a:solidFill>
+                      <a:srgbClr val="F5F5F5"/>
+                    </a:solidFill>
+                  </a:tcPr>
+                </a:tc>
+                <a:tc>
+                  <a:txBody>
+                    <a:bodyPr/>
+                    <a:lstStyle/>
+                    <a:p>
+                      <a:pPr>
+                        <a:defRPr sz="950">
+                          <a:solidFill>
+                            <a:srgbClr val="1E1E1E"/>
+                          </a:solidFill>
+                        </a:defRPr>
+                      </a:pPr>
+                      <a:r>
+                        <a:t>中</a:t>
+                      </a:r>
+                    </a:p>
+                  </a:txBody>
+                  <a:tcPr>
+                    <a:solidFill>
+                      <a:srgbClr val="F5F5F5"/>
+                    </a:solidFill>
+                  </a:tcPr>
+                </a:tc>
+                <a:tc>
+                  <a:txBody>
+                    <a:bodyPr/>
+                    <a:lstStyle/>
+                    <a:p>
+                      <a:pPr>
+                        <a:defRPr sz="950">
+                          <a:solidFill>
+                            <a:srgbClr val="1E1E1E"/>
+                          </a:solidFill>
+                        </a:defRPr>
+                      </a:pPr>
+                      <a:r>
+                        <a:t>新たなコンセプトを掲げた新業態のスーパーマーケットをオープン。地元の食材を積極的に取り入れ、体験型の食の提供を目指し、ファミリー層をターゲットとする。</a:t>
+                      </a:r>
+                    </a:p>
+                  </a:txBody>
+                  <a:tcPr>
+                    <a:solidFill>
+                      <a:srgbClr val="F5F5F5"/>
+                    </a:solidFill>
+                  </a:tcPr>
+                </a:tc>
+              </a:tr>
+            </a:tbl>
+          </a:graphicData>
+        </a:graphic>
+      </p:graphicFrame>
+    </p:spTree>
+  </p:cSld>
+  <p:clrMapOvr>
+    <a:masterClrMapping/>
+  </p:clrMapOvr>
+</p:sld>
+</file>
+
+<file path=ppt/slides/slide4.xml><?xml version="1.0" encoding="utf-8"?>
+<p:sld xmlns:a="http://schemas.openxmlformats.org/drawingml/2006/main" xmlns:p="http://schemas.openxmlformats.org/presentationml/2006/main" xmlns:r="http://schemas.openxmlformats.org/officeDocument/2006/relationships">
+  <p:cSld>
+    <p:spTree>
+      <p:nvGrpSpPr>
+        <p:cNvPr id="1" name=""/>
+        <p:cNvGrpSpPr/>
+        <p:nvPr/>
+      </p:nvGrpSpPr>
+      <p:grpSpPr/>
+      <p:sp>
+        <p:nvSpPr>
+          <p:cNvPr id="2" name="TextBox 1"/>
+          <p:cNvSpPr txBox="1"/>
+          <p:nvPr/>
+        </p:nvSpPr>
+        <p:spPr>
+          <a:xfrm>
+            <a:off x="685800" y="457200"/>
+            <a:ext cx="10817352" cy="731520"/>
+          </a:xfrm>
+          <a:prstGeom prst="rect">
+            <a:avLst/>
+          </a:prstGeom>
+          <a:noFill/>
+        </p:spPr>
+        <p:txBody>
+          <a:bodyPr wrap="square">
+            <a:spAutoFit/>
+          </a:bodyPr>
+          <a:lstStyle/>
+          <a:p>
+            <a:pPr>
+              <a:defRPr b="1" sz="2800">
+                <a:solidFill>
+                  <a:srgbClr val="005BAC"/>
+                </a:solidFill>
+              </a:defRPr>
+            </a:pPr>
+            <a:r>
+              <a:t>c) 【地図的分析】</a:t>
+            </a:r>
+          </a:p>
+        </p:txBody>
+      </p:sp>
+      <p:sp>
+        <p:nvSpPr>
+          <p:cNvPr id="3" name="TextBox 2"/>
+          <p:cNvSpPr txBox="1"/>
+          <p:nvPr/>
+        </p:nvSpPr>
+        <p:spPr>
+          <a:xfrm>
+            <a:off x="685800" y="1280160"/>
+            <a:ext cx="10817352" cy="4846320"/>
+          </a:xfrm>
+          <a:prstGeom prst="rect">
+            <a:avLst/>
+          </a:prstGeom>
+          <a:noFill/>
+        </p:spPr>
+        <p:txBody>
+          <a:bodyPr wrap="square">
+            <a:spAutoFit/>
+          </a:bodyPr>
+          <a:lstStyle/>
+          <a:p>
+            <a:pPr>
+              <a:spcAft>
+                <a:spcPts val="1400"/>
+              </a:spcAft>
+              <a:defRPr sz="1400">
+                <a:solidFill>
+                  <a:srgbClr val="1E1E1E"/>
+                </a:solidFill>
+              </a:defRPr>
+            </a:pPr>
+            <a:r>
+              <a:t>今回判明した競合動向は、いかりスーパーの既存店舗が集中する阪神間エリアにおいて、多方向からの競争激化を示唆しています。</a:t>
+            </a:r>
+          </a:p>
+          <a:p>
+            <a:pPr>
+              <a:spcAft>
+                <a:spcPts val="1400"/>
+              </a:spcAft>
+              <a:defRPr sz="1400">
+                <a:solidFill>
+                  <a:srgbClr val="1E1E1E"/>
+                </a:solidFill>
+              </a:defRPr>
+            </a:pPr>
+            <a:r>
+              <a:t>*   **ライフ本山店のリニューアル（神戸市東灘区）：** いかりスーパーは東灘区に岡本店、御影店、摂津本山駅前店と3店舗を展開しており、高級スーパーとしての地位を確立しています。ライフ本山店はこれらのいかり店舗と近接しており、大規模改装による品揃え強化やサービス拡充は、既存顧客の流出に直結する強い競争圧力となります。特に本山エリアは富裕層が多く、食へのこだわりが強い顧客が多いため、いかりスーパーの主要顧客層と直接競合するでしょう。</a:t>
+            </a:r>
+          </a:p>
+          <a:p>
+            <a:pPr>
+              <a:spcAft>
+                <a:spcPts val="1400"/>
+              </a:spcAft>
+              <a:defRPr sz="1400">
+                <a:solidFill>
+                  <a:srgbClr val="1E1E1E"/>
+                </a:solidFill>
+              </a:defRPr>
+            </a:pPr>
+            <a:r>
+              <a:t>*   **万代の大阪市中央区新規出店：** 大阪市中央区は南海なんば店がいかりスーパーの拠点となっています。万代の新規出店は、具体的な場所が未定ながらも「既存のスーパーが少ないエリア」を狙うとしており、いかりがカバーしきれていない、あるいは潜在的な需要があるエリアを万代が確保する可能性があります。都心部に位置するJR大阪店にも間接的に影響が及ぶことも考えられ、都市型スーパーとしての競争環境が変化する可能性があります。</a:t>
+            </a:r>
+          </a:p>
+          <a:p>
+            <a:pPr>
+              <a:spcAft>
+                <a:spcPts val="1400"/>
+              </a:spcAft>
+              <a:defRPr sz="1400">
+                <a:solidFill>
+                  <a:srgbClr val="1E1E1E"/>
+                </a:solidFill>
+              </a:defRPr>
+            </a:pPr>
+            <a:r>
+              <a:t>*   **食品館アプロの兵庫県川西市新業態店：** 川西市は、いかり宝塚店、阪急逆瀬川店、阪急伊丹店、箕面店といった北摂・阪神間の店舗が周辺に位置します。アプロの新業態店が「体験型」や「地元の食材」を重視し「ファミリー層」をターゲットとすることは、いかりが提供する高級食材やこだわりの品とは異なるものの、食への意識が高い顧客層への新たなアプローチとなり得ます。いかりの顧客層と一部重なる可能性があり、地域の食の選択肢を広げることで、顧客の分散を招く可能性があります。</a:t>
+            </a:r>
+          </a:p>
+        </p:txBody>
+      </p:sp>
+    </p:spTree>
+  </p:cSld>
+  <p:clrMapOvr>
+    <a:masterClrMapping/>
+  </p:clrMapOvr>
+</p:sld>
+</file>
+
+<file path=ppt/slides/slide5.xml><?xml version="1.0" encoding="utf-8"?>
+<p:sld xmlns:a="http://schemas.openxmlformats.org/drawingml/2006/main" xmlns:p="http://schemas.openxmlformats.org/presentationml/2006/main" xmlns:r="http://schemas.openxmlformats.org/officeDocument/2006/relationships">
+  <p:cSld>
+    <p:spTree>
+      <p:nvGrpSpPr>
+        <p:cNvPr id="1" name=""/>
+        <p:cNvGrpSpPr/>
+        <p:nvPr/>
+      </p:nvGrpSpPr>
+      <p:grpSpPr/>
+      <p:sp>
+        <p:nvSpPr>
+          <p:cNvPr id="2" name="TextBox 1"/>
+          <p:cNvSpPr txBox="1"/>
+          <p:nvPr/>
+        </p:nvSpPr>
+        <p:spPr>
+          <a:xfrm>
+            <a:off x="685800" y="457200"/>
+            <a:ext cx="10817352" cy="731520"/>
+          </a:xfrm>
+          <a:prstGeom prst="rect">
+            <a:avLst/>
+          </a:prstGeom>
+          <a:noFill/>
+        </p:spPr>
+        <p:txBody>
+          <a:bodyPr wrap="square">
+            <a:spAutoFit/>
+          </a:bodyPr>
+          <a:lstStyle/>
+          <a:p>
+            <a:pPr>
+              <a:defRPr b="1" sz="2800">
+                <a:solidFill>
+                  <a:srgbClr val="005BAC"/>
+                </a:solidFill>
+              </a:defRPr>
+            </a:pPr>
+            <a:r>
+              <a:t>d) 【影響分析】</a:t>
+            </a:r>
+          </a:p>
+        </p:txBody>
+      </p:sp>
+      <p:sp>
+        <p:nvSpPr>
+          <p:cNvPr id="3" name="TextBox 2"/>
+          <p:cNvSpPr txBox="1"/>
+          <p:nvPr/>
+        </p:nvSpPr>
+        <p:spPr>
+          <a:xfrm>
+            <a:off x="685800" y="1280160"/>
+            <a:ext cx="10817352" cy="4846320"/>
+          </a:xfrm>
+          <a:prstGeom prst="rect">
+            <a:avLst/>
+          </a:prstGeom>
+          <a:noFill/>
+        </p:spPr>
+        <p:txBody>
+          <a:bodyPr wrap="square">
+            <a:spAutoFit/>
+          </a:bodyPr>
+          <a:lstStyle/>
+          <a:p>
+            <a:pPr>
+              <a:spcAft>
+                <a:spcPts val="1200"/>
+              </a:spcAft>
+              <a:defRPr sz="1350">
+                <a:solidFill>
+                  <a:srgbClr val="1E1E1E"/>
+                </a:solidFill>
+              </a:defRPr>
+            </a:pPr>
+            <a:r>
+              <a:t>今回判明した競合動向は、いかりスーパーの経営戦略において、特に以下の点で影響を及ぼすと予測されます。</a:t>
+            </a:r>
+          </a:p>
+          <a:p>
+            <a:pPr>
+              <a:spcAft>
+                <a:spcPts val="1200"/>
+              </a:spcAft>
+              <a:defRPr sz="1350">
+                <a:solidFill>
+                  <a:srgbClr val="1E1E1E"/>
+                </a:solidFill>
+              </a:defRPr>
+            </a:pPr>
+            <a:r>
+              <a:t>*   **神戸市東灘区での顧客維持戦略の強化：** ライフ本山店の大規模リニューアルは、いかり岡本店、御影店、摂津本山駅前店の売上に直接的な影響を与える可能性が高いです。特に、ライフが「生鮮食品の品揃え強化」や「デリバリーサービス拡充」を掲げていることから、いかりはこれらに対抗する独自の強み（例えば、高品質なプライベートブランド商品、希少性の高い食材、個別対応の強化、よりパーソナルなデリバリー体験など）を明確にし、顧客ロイヤルティを高める施策を早急に講じる必要があります。</a:t>
+            </a:r>
+          </a:p>
+          <a:p>
+            <a:pPr>
+              <a:spcAft>
+                <a:spcPts val="1200"/>
+              </a:spcAft>
+              <a:defRPr sz="1350">
+                <a:solidFill>
+                  <a:srgbClr val="1E1E1E"/>
+                </a:solidFill>
+              </a:defRPr>
+            </a:pPr>
+            <a:r>
+              <a:t>*   **大阪都心部における潜在顧客層の奪い合い：** 万代の大阪市中央区への新規出店は、特に南海なんば店の商圏に影響を与える可能性があります。万代が「既存のスーパーが少ないエリア」を狙うということは、いかりが未開拓の、あるいはまだ十分にアプローチできていない顧客層を万代が獲得するリスクがあることを意味します。いかりとしては、都心部の店舗において、いかりならではの利便性や特別感をどのように提供できるか、改めて戦略を練る必要があるでしょう。</a:t>
+            </a:r>
+          </a:p>
+          <a:p>
+            <a:pPr>
+              <a:spcAft>
+                <a:spcPts val="1200"/>
+              </a:spcAft>
+              <a:defRPr sz="1350">
+                <a:solidFill>
+                  <a:srgbClr val="1E1E1E"/>
+                </a:solidFill>
+              </a:defRPr>
+            </a:pPr>
+            <a:r>
+              <a:t>*   **北摂・阪神間における「食体験」の多様化への対応：** 食品館アプロの川西市における新業態店は、いかりの宝塚店、阪急逆瀬川店、阪急伊丹店、箕面店といった周辺店舗の顧客層に影響を与える可能性があります。「体験型」や「地元の食材」への注力は、食に対する新たな価値観を提案するものであり、いかりが提供する「高品質・高級志向」とは異なるが共存しうる顧客ニーズに応えるものです。いかりも、単なる商品提供に留まらない「食の楽しみ」や「体験」を提供するイベントやサービスを検討することで、顧客の囲い込みを図る必要があるかもしれません。</a:t>
+            </a:r>
+          </a:p>
+          <a:p>
+            <a:pPr>
+              <a:spcAft>
+                <a:spcPts val="1200"/>
+              </a:spcAft>
+              <a:defRPr sz="1350">
+                <a:solidFill>
+                  <a:srgbClr val="1E1E1E"/>
+                </a:solidFill>
+              </a:defRPr>
+            </a:pPr>
+            <a:r>
+              <a:t>*   **関西エリア全体の競争環境の複雑化：** 今回の動向は、いかりスーパーが活動する関西エリア全体で、既存の有力競合がさらに質を高める動き、中堅競合が新たな地域や形態で攻勢をかける動きが同時に進行していることを示しています。いかりとしては、高級スーパーとしてのブランド価値を維持しつつ、各地域の特性と競合の動向をきめ細かく分析し、柔軟かつスピーディーな戦略調整が求められます。</a:t>
+            </a:r>
+          </a:p>
+        </p:txBody>
+      </p:sp>
+    </p:spTree>
+  </p:cSld>
+  <p:clrMapOvr>
+    <a:masterClrMapping/>
+  </p:clrMapOvr>
+</p:sld>
+</file>
+
+<file path=ppt/slides/slide6.xml><?xml version="1.0" encoding="utf-8"?>
+<p:sld xmlns:a="http://schemas.openxmlformats.org/drawingml/2006/main" xmlns:p="http://schemas.openxmlformats.org/presentationml/2006/main" xmlns:r="http://schemas.openxmlformats.org/officeDocument/2006/relationships">
+  <p:cSld>
+    <p:spTree>
+      <p:nvGrpSpPr>
+        <p:cNvPr id="1" name=""/>
+        <p:cNvGrpSpPr/>
+        <p:nvPr/>
+      </p:nvGrpSpPr>
+      <p:grpSpPr/>
+      <p:sp>
+        <p:nvSpPr>
+          <p:cNvPr id="2" name="TextBox 1"/>
+          <p:cNvSpPr txBox="1"/>
+          <p:nvPr/>
+        </p:nvSpPr>
+        <p:spPr>
+          <a:xfrm>
+            <a:off x="685800" y="457200"/>
+            <a:ext cx="10817352" cy="731520"/>
+          </a:xfrm>
+          <a:prstGeom prst="rect">
+            <a:avLst/>
+          </a:prstGeom>
+          <a:noFill/>
+        </p:spPr>
+        <p:txBody>
+          <a:bodyPr wrap="square">
+            <a:spAutoFit/>
+          </a:bodyPr>
+          <a:lstStyle/>
+          <a:p>
+            <a:pPr>
+              <a:defRPr b="1" sz="2800">
+                <a:solidFill>
+                  <a:srgbClr val="005BAC"/>
+                </a:solidFill>
+              </a:defRPr>
+            </a:pPr>
+            <a:r>
+              <a:t>e) 【参照ソース】</a:t>
+            </a:r>
+          </a:p>
+        </p:txBody>
+      </p:sp>
+      <p:sp>
+        <p:nvSpPr>
+          <p:cNvPr id="3" name="TextBox 2"/>
+          <p:cNvSpPr txBox="1"/>
+          <p:nvPr/>
+        </p:nvSpPr>
+        <p:spPr>
+          <a:xfrm>
+            <a:off x="685800" y="1280160"/>
+            <a:ext cx="10817352" cy="4846320"/>
+          </a:xfrm>
+          <a:prstGeom prst="rect">
+            <a:avLst/>
+          </a:prstGeom>
+          <a:noFill/>
+        </p:spPr>
+        <p:txBody>
+          <a:bodyPr wrap="square">
+            <a:spAutoFit/>
+          </a:bodyPr>
+          <a:lstStyle/>
+          <a:p>
+            <a:pPr>
+              <a:spcAft>
+                <a:spcPts val="800"/>
+              </a:spcAft>
+            </a:pPr>
+            <a:r>
+              <a:rPr sz="1200">
+                <a:solidFill>
+                  <a:srgbClr val="1E1E1E"/>
+                </a:solidFill>
+              </a:rPr>
+              <a:t>・ </a:t>
+            </a:r>
+            <a:r>
+              <a:rPr sz="1200">
+                <a:solidFill>
+                  <a:srgbClr val="1E1E1E"/>
+                </a:solidFill>
+              </a:rPr>
+              <a:t>  </a:t>
+            </a:r>
+            <a:r>
+              <a:rPr sz="1200" u="sng">
+                <a:solidFill>
+                  <a:srgbClr val="0066CC"/>
+                </a:solidFill>
+                <a:hlinkClick r:id="rId2"/>
+              </a:rPr>
+              <a:t>ライフ本山店、2026年秋にリニューアルオープンへ。新たな顧客体験の提供を目指す</a:t>
+            </a:r>
+          </a:p>
+          <a:p>
+            <a:pPr>
+              <a:spcAft>
+                <a:spcPts val="800"/>
+              </a:spcAft>
+            </a:pPr>
+            <a:r>
+              <a:rPr sz="1200">
+                <a:solidFill>
+                  <a:srgbClr val="1E1E1E"/>
+                </a:solidFill>
+              </a:rPr>
+              <a:t>・ </a:t>
+            </a:r>
+            <a:r>
+              <a:rPr sz="1200">
+                <a:solidFill>
+                  <a:srgbClr val="1E1E1E"/>
+                </a:solidFill>
+              </a:rPr>
+              <a:t>  </a:t>
+            </a:r>
+            <a:r>
+              <a:rPr sz="1200" u="sng">
+                <a:solidFill>
+                  <a:srgbClr val="0066CC"/>
+                </a:solidFill>
+                <a:hlinkClick r:id="rId3"/>
+              </a:rPr>
+              <a:t>【速報】万代が大阪市内に新店舗計画。来年春のオープン目指す</a:t>
+            </a:r>
+          </a:p>
+          <a:p>
+            <a:pPr>
+              <a:spcAft>
+                <a:spcPts val="800"/>
+              </a:spcAft>
+            </a:pPr>
+            <a:r>
+              <a:rPr sz="1200">
+                <a:solidFill>
+                  <a:srgbClr val="1E1E1E"/>
+                </a:solidFill>
+              </a:rPr>
+              <a:t>・ </a:t>
+            </a:r>
+            <a:r>
+              <a:rPr sz="1200">
+                <a:solidFill>
+                  <a:srgbClr val="1E1E1E"/>
+                </a:solidFill>
+              </a:rPr>
+              <a:t>  </a:t>
+            </a:r>
+            <a:r>
+              <a:rPr sz="1200" u="sng">
+                <a:solidFill>
+                  <a:srgbClr val="0066CC"/>
+                </a:solidFill>
+                <a:hlinkClick r:id="rId4"/>
+              </a:rPr>
+              <a:t>食品館アプロ、兵庫県川西市に新業態店を2027年初夏オープン予定</a:t>
+            </a:r>
+          </a:p>
+        </p:txBody>
+      </p:sp>
+    </p:spTree>
+  </p:cSld>
+  <p:clrMapOvr>
+    <a:masterClrMapping/>
+  </p:clrMapOvr>
+</p:sld>
+</file>
+
+<file path=ppt/slides/slide7.xml><?xml version="1.0" encoding="utf-8"?>
+<p:sld xmlns:a="http://schemas.openxmlformats.org/drawingml/2006/main" xmlns:p="http://schemas.openxmlformats.org/presentationml/2006/main" xmlns:r="http://schemas.openxmlformats.org/officeDocument/2006/relationships">
+  <p:cSld>
+    <p:spTree>
+      <p:nvGrpSpPr>
+        <p:cNvPr id="1" name=""/>
+        <p:cNvGrpSpPr/>
+        <p:nvPr/>
+      </p:nvGrpSpPr>
+      <p:grpSpPr/>
+      <p:sp>
+        <p:nvSpPr>
+          <p:cNvPr id="2" name="TextBox 1"/>
+          <p:cNvSpPr txBox="1"/>
+          <p:nvPr/>
+        </p:nvSpPr>
+        <p:spPr>
+          <a:xfrm>
+            <a:off x="685800" y="457200"/>
+            <a:ext cx="10817352" cy="731520"/>
+          </a:xfrm>
+          <a:prstGeom prst="rect">
+            <a:avLst/>
+          </a:prstGeom>
+          <a:noFill/>
+        </p:spPr>
+        <p:txBody>
+          <a:bodyPr wrap="square">
+            <a:spAutoFit/>
+          </a:bodyPr>
+          <a:lstStyle/>
+          <a:p>
+            <a:pPr>
+              <a:defRPr b="1" sz="2800">
+                <a:solidFill>
+                  <a:srgbClr val="005BAC"/>
+                </a:solidFill>
+              </a:defRPr>
+            </a:pPr>
+            <a:r>
+              <a:t>f) 【ビジュアルマップ】</a:t>
+            </a:r>
+          </a:p>
+        </p:txBody>
+      </p:sp>
+      <p:pic>
+        <p:nvPicPr>
+          <p:cNvPr id="3" name="Picture 2" descr="2026_06_28_competitive_map_no_limit.png"/>
+          <p:cNvPicPr>
+            <a:picLocks noChangeAspect="1"/>
+          </p:cNvPicPr>
+          <p:nvPr/>
+        </p:nvPicPr>
+        <p:blipFill>
+          <a:blip r:embed="rId2"/>
+          <a:stretch>
+            <a:fillRect/>
+          </a:stretch>
+        </p:blipFill>
+        <p:spPr>
+          <a:xfrm>
+            <a:off x="3483864" y="1188720"/>
+            <a:ext cx="5212080" cy="5212080"/>
+          </a:xfrm>
+          <a:prstGeom prst="rect">
+            <a:avLst/>
+          </a:prstGeom>
+        </p:spPr>
+      </p:pic>
     </p:spTree>
   </p:cSld>
   <p:clrMapOvr>

--- a/report/2026_06_28_competitive_report_no_limit.pptx
+++ b/report/2026_06_28_competitive_report_no_limit.pptx
@@ -12,6 +12,7 @@
     <p:sldId id="260" r:id="rId11"/>
     <p:sldId id="261" r:id="rId12"/>
     <p:sldId id="262" r:id="rId13"/>
+    <p:sldId id="263" r:id="rId14"/>
   </p:sldIdLst>
   <p:sldSz cx="12188952" cy="6858000" type="screen4x3"/>
   <p:notesSz cx="6858000" cy="9144000"/>
@@ -3238,7 +3239,7 @@
               </a:defRPr>
             </a:pPr>
             <a:r>
-              <a:t>・ 調査日以降の関西エリアのスーパーマーケット市場においては、既存競合の刷新と新たな出店計画が複数確認されました。特に、いかりスーパーの主要商圏である神戸市東灘区での有力競合のリニューアル、大阪市中心部での新規出店、そして兵庫県北摂エリアでの新業態店の展開が挙げられます。これにより、いかりスーパーは既存店舗の顧客維持に加え、新たな顧客層へのアプローチ戦略を再検討する必要があると考えられます。</a:t>
+              <a:t>・ 2026年6月28日（調査日）以降の関西エリアのスーパーマーケット市場においては、ディスカウント型スーパーの新規出店と、既存スーパーの競争力強化を目的としたリニューアル・業態転換が主要な動向として確認されました。特に以下の点が、いかりスーパーマーケットの経営判断に直結する変化として挙げられます。</a:t>
             </a:r>
           </a:p>
           <a:p>
@@ -3253,7 +3254,7 @@
               </a:defRPr>
             </a:pPr>
             <a:r>
-              <a:t>・   神戸市東灘区において、ライフ本山店が2026年秋に大規模リニューアルを予定しており、いかり岡本店、御影店、摂津本山駅前店への直接的な競合圧力が強化されます。</a:t>
+              <a:t>・   ディスカウントスーパー「オーケー」が大阪府内で計3店舗（高槻市、大阪市平野区、大阪市東淀川区）の新規出店を予定しており、特に高槻市と大阪市北区のいかり既存店舗への影響が懸念されます。</a:t>
             </a:r>
           </a:p>
           <a:p>
@@ -3268,7 +3269,7 @@
               </a:defRPr>
             </a:pPr>
             <a:r>
-              <a:t>・   大阪市中央区では、万代が2027年春頃の新規店舗オープンを目指しており、南海なんば店、JR大阪店といった都心部のいかり店舗の商圏に影響を与える可能性があります。</a:t>
+              <a:t>・   「関西スーパー」は、高価格帯の「マルシェ」型と並行し、価格訴求型の「デイリーマート」への業態転換を大阪府守口市で実施予定であり、広範な価格帯での競争が激化する可能性があります。</a:t>
             </a:r>
           </a:p>
           <a:p>
@@ -3283,7 +3284,7 @@
               </a:defRPr>
             </a:pPr>
             <a:r>
-              <a:t>・   兵庫県川西市には、食品館アプロが2027年初夏に新業態店を開店予定で、体験型サービスを重視する新たな競争軸が持ち込まれ、周辺のいかり店舗（宝塚店、阪急逆瀬川店、阪急伊丹店、箕面店）に影響が及ぶ可能性があります。</a:t>
+              <a:t>・   「ライフコーポレーション」も大阪市北区での新規出店を計画しており、同エリアのいかりJR大阪店への競合が予想されます。</a:t>
             </a:r>
           </a:p>
           <a:p>
@@ -3298,7 +3299,22 @@
               </a:defRPr>
             </a:pPr>
             <a:r>
-              <a:t>・   これらの動きは、既存顧客層の囲い込み強化、新たな客層の獲得、そして「食体験」の価値提供という多角的な側面から、いかりスーパー全体への競争環境を厳しくすると考えられます。</a:t>
+              <a:t>・   高級スーパー「成城石井」の新規出店情報は、調査日以前にオープン済みであるため、今回の報告対象外ですが、依然として高級スーパーセグメントでの競争環境は注視が必要です。</a:t>
+            </a:r>
+          </a:p>
+          <a:p>
+            <a:pPr>
+              <a:spcAft>
+                <a:spcPts val="1600"/>
+              </a:spcAft>
+              <a:defRPr sz="1800">
+                <a:solidFill>
+                  <a:srgbClr val="1E1E1E"/>
+                </a:solidFill>
+              </a:defRPr>
+            </a:pPr>
+            <a:r>
+              <a:t>・   関西スーパーの店舗に併設される形で「バーガーキング」の新規出店が複数確認されており、これらの複合施設化による集客力向上が周辺の食品スーパーにも間接的な影響を与える可能性があります。</a:t>
             </a:r>
           </a:p>
         </p:txBody>
@@ -3383,7 +3399,7 @@
                 <a:gridCol w="914400"/>
                 <a:gridCol w="4142232"/>
               </a:tblGrid>
-              <a:tr h="1188720">
+              <a:tr h="679268">
                 <a:tc>
                   <a:txBody>
                     <a:bodyPr/>
@@ -3546,7 +3562,7 @@
                   </a:tcPr>
                 </a:tc>
               </a:tr>
-              <a:tr h="1188720">
+              <a:tr h="679268">
                 <a:tc>
                   <a:txBody>
                     <a:bodyPr/>
@@ -3560,7 +3576,7 @@
                         </a:defRPr>
                       </a:pPr>
                       <a:r>
-                        <a:t>兵庫県神戸市東灘区</a:t>
+                        <a:t>大阪府高槻市</a:t>
                       </a:r>
                     </a:p>
                   </a:txBody>
@@ -3583,7 +3599,7 @@
                         </a:defRPr>
                       </a:pPr>
                       <a:r>
-                        <a:t>ライフ本山店</a:t>
+                        <a:t>オーケー 高槻赤大路店</a:t>
                       </a:r>
                     </a:p>
                   </a:txBody>
@@ -3606,7 +3622,7 @@
                         </a:defRPr>
                       </a:pPr>
                       <a:r>
-                        <a:t>2026年秋（10月上旬予定）</a:t>
+                        <a:t>2026年8月下旬</a:t>
                       </a:r>
                     </a:p>
                   </a:txBody>
@@ -3629,7 +3645,7 @@
                         </a:defRPr>
                       </a:pPr>
                       <a:r>
-                        <a:t>大規模改装、リニューアルオープン</a:t>
+                        <a:t>新規出店</a:t>
                       </a:r>
                     </a:p>
                   </a:txBody>
@@ -3652,7 +3668,7 @@
                         </a:defRPr>
                       </a:pPr>
                       <a:r>
-                        <a:t>岡本店, 御影店, 摂津本山駅前店</a:t>
+                        <a:t>高槻店</a:t>
                       </a:r>
                     </a:p>
                   </a:txBody>
@@ -3698,7 +3714,7 @@
                         </a:defRPr>
                       </a:pPr>
                       <a:r>
-                        <a:t>生鮮食品の品揃え強化やデリバリーサービスの拡充を図り、地域顧客ニーズに応える。いかりの主要商圏である東灘区での競争が激化。</a:t>
+                        <a:t>「高品質・Everyday Low Price」を掲げるディスカウントスーパーの新規出店であり、いかり高槻店と商圏が重複し、価格競争が激化する可能性が高いです。</a:t>
                       </a:r>
                     </a:p>
                   </a:txBody>
@@ -3709,7 +3725,7 @@
                   </a:tcPr>
                 </a:tc>
               </a:tr>
-              <a:tr h="1188720">
+              <a:tr h="679268">
                 <a:tc>
                   <a:txBody>
                     <a:bodyPr/>
@@ -3723,7 +3739,7 @@
                         </a:defRPr>
                       </a:pPr>
                       <a:r>
-                        <a:t>大阪府大阪市中央区</a:t>
+                        <a:t>大阪府大阪市平野区</a:t>
                       </a:r>
                     </a:p>
                   </a:txBody>
@@ -3742,7 +3758,7 @@
                         </a:defRPr>
                       </a:pPr>
                       <a:r>
-                        <a:t>万代（新規店舗）</a:t>
+                        <a:t>オーケー 長吉店</a:t>
                       </a:r>
                     </a:p>
                   </a:txBody>
@@ -3761,7 +3777,7 @@
                         </a:defRPr>
                       </a:pPr>
                       <a:r>
-                        <a:t>2027年3月頃予定</a:t>
+                        <a:t>2026年11月中旬</a:t>
                       </a:r>
                     </a:p>
                   </a:txBody>
@@ -3780,7 +3796,7 @@
                         </a:defRPr>
                       </a:pPr>
                       <a:r>
-                        <a:t>新規出店計画</a:t>
+                        <a:t>新規出店</a:t>
                       </a:r>
                     </a:p>
                   </a:txBody>
@@ -3799,7 +3815,7 @@
                         </a:defRPr>
                       </a:pPr>
                       <a:r>
-                        <a:t>南海なんば店, JR大阪店</a:t>
+                        <a:t>南海なんば店、JR大阪店</a:t>
                       </a:r>
                     </a:p>
                   </a:txBody>
@@ -3818,7 +3834,7 @@
                         </a:defRPr>
                       </a:pPr>
                       <a:r>
-                        <a:t>中～高</a:t>
+                        <a:t>中</a:t>
                       </a:r>
                     </a:p>
                   </a:txBody>
@@ -3837,14 +3853,14 @@
                         </a:defRPr>
                       </a:pPr>
                       <a:r>
-                        <a:t>大阪市中央区に新規店舗を出店し、既存のスーパーが少ないエリアでの展開を検討。都心部での新たな顧客層獲得を目指す。</a:t>
+                        <a:t>大阪府内でのオーケーの出店加速の一環であり、広域での顧客獲得競争に影響を与える可能性があります。</a:t>
                       </a:r>
                     </a:p>
                   </a:txBody>
                   <a:tcPr/>
                 </a:tc>
               </a:tr>
-              <a:tr h="1188720">
+              <a:tr h="679268">
                 <a:tc>
                   <a:txBody>
                     <a:bodyPr/>
@@ -3858,7 +3874,7 @@
                         </a:defRPr>
                       </a:pPr>
                       <a:r>
-                        <a:t>兵庫県川西市</a:t>
+                        <a:t>大阪府大阪市東淀川区</a:t>
                       </a:r>
                     </a:p>
                   </a:txBody>
@@ -3881,7 +3897,7 @@
                         </a:defRPr>
                       </a:pPr>
                       <a:r>
-                        <a:t>食品館アプロ（新業態店）</a:t>
+                        <a:t>オーケー （仮称）下新庄店</a:t>
                       </a:r>
                     </a:p>
                   </a:txBody>
@@ -3904,7 +3920,7 @@
                         </a:defRPr>
                       </a:pPr>
                       <a:r>
-                        <a:t>2027年初夏予定</a:t>
+                        <a:t>時期未定（2026年1月30日時点での新規出店計画判明）</a:t>
                       </a:r>
                     </a:p>
                   </a:txBody>
@@ -3927,7 +3943,7 @@
                         </a:defRPr>
                       </a:pPr>
                       <a:r>
-                        <a:t>新業態店オープン計画</a:t>
+                        <a:t>新規出店</a:t>
                       </a:r>
                     </a:p>
                   </a:txBody>
@@ -3950,7 +3966,7 @@
                         </a:defRPr>
                       </a:pPr>
                       <a:r>
-                        <a:t>宝塚店, 阪急逆瀬川店, 阪急伊丹店, 箕面店</a:t>
+                        <a:t>豊中店、王子店、JR大阪店</a:t>
                       </a:r>
                     </a:p>
                   </a:txBody>
@@ -3996,7 +4012,7 @@
                         </a:defRPr>
                       </a:pPr>
                       <a:r>
-                        <a:t>新たなコンセプトを掲げた新業態のスーパーマーケットをオープン。地元の食材を積極的に取り入れ、体験型の食の提供を目指し、ファミリー層をターゲットとする。</a:t>
+                        <a:t>阪急電鉄下新庄駅近くに新規出店が計画されており、複数のいかり既存店舗の商圏に影響を与える可能性があります。</a:t>
                       </a:r>
                     </a:p>
                   </a:txBody>
@@ -4005,6 +4021,439 @@
                       <a:srgbClr val="F5F5F5"/>
                     </a:solidFill>
                   </a:tcPr>
+                </a:tc>
+              </a:tr>
+              <a:tr h="679268">
+                <a:tc>
+                  <a:txBody>
+                    <a:bodyPr/>
+                    <a:lstStyle/>
+                    <a:p>
+                      <a:pPr>
+                        <a:defRPr sz="950">
+                          <a:solidFill>
+                            <a:srgbClr val="1E1E1E"/>
+                          </a:solidFill>
+                        </a:defRPr>
+                      </a:pPr>
+                      <a:r>
+                        <a:t>大阪府守口市</a:t>
+                      </a:r>
+                    </a:p>
+                  </a:txBody>
+                  <a:tcPr/>
+                </a:tc>
+                <a:tc>
+                  <a:txBody>
+                    <a:bodyPr/>
+                    <a:lstStyle/>
+                    <a:p>
+                      <a:pPr>
+                        <a:defRPr sz="950">
+                          <a:solidFill>
+                            <a:srgbClr val="1E1E1E"/>
+                          </a:solidFill>
+                        </a:defRPr>
+                      </a:pPr>
+                      <a:r>
+                        <a:t>関西スーパー デイリーマート西郷店</a:t>
+                      </a:r>
+                    </a:p>
+                  </a:txBody>
+                  <a:tcPr/>
+                </a:tc>
+                <a:tc>
+                  <a:txBody>
+                    <a:bodyPr/>
+                    <a:lstStyle/>
+                    <a:p>
+                      <a:pPr>
+                        <a:defRPr sz="950">
+                          <a:solidFill>
+                            <a:srgbClr val="1E1E1E"/>
+                          </a:solidFill>
+                        </a:defRPr>
+                      </a:pPr>
+                      <a:r>
+                        <a:t>2026年7月3日</a:t>
+                      </a:r>
+                    </a:p>
+                  </a:txBody>
+                  <a:tcPr/>
+                </a:tc>
+                <a:tc>
+                  <a:txBody>
+                    <a:bodyPr/>
+                    <a:lstStyle/>
+                    <a:p>
+                      <a:pPr>
+                        <a:defRPr sz="950">
+                          <a:solidFill>
+                            <a:srgbClr val="1E1E1E"/>
+                          </a:solidFill>
+                        </a:defRPr>
+                      </a:pPr>
+                      <a:r>
+                        <a:t>リニューアルオープン（デイリーマート業態へ転換）</a:t>
+                      </a:r>
+                    </a:p>
+                  </a:txBody>
+                  <a:tcPr/>
+                </a:tc>
+                <a:tc>
+                  <a:txBody>
+                    <a:bodyPr/>
+                    <a:lstStyle/>
+                    <a:p>
+                      <a:pPr>
+                        <a:defRPr sz="950">
+                          <a:solidFill>
+                            <a:srgbClr val="1E1E1E"/>
+                          </a:solidFill>
+                        </a:defRPr>
+                      </a:pPr>
+                      <a:r>
+                        <a:t>王子店、高槻店</a:t>
+                      </a:r>
+                    </a:p>
+                  </a:txBody>
+                  <a:tcPr/>
+                </a:tc>
+                <a:tc>
+                  <a:txBody>
+                    <a:bodyPr/>
+                    <a:lstStyle/>
+                    <a:p>
+                      <a:pPr>
+                        <a:defRPr sz="950">
+                          <a:solidFill>
+                            <a:srgbClr val="1E1E1E"/>
+                          </a:solidFill>
+                        </a:defRPr>
+                      </a:pPr>
+                      <a:r>
+                        <a:t>中</a:t>
+                      </a:r>
+                    </a:p>
+                  </a:txBody>
+                  <a:tcPr/>
+                </a:tc>
+                <a:tc>
+                  <a:txBody>
+                    <a:bodyPr/>
+                    <a:lstStyle/>
+                    <a:p>
+                      <a:pPr>
+                        <a:defRPr sz="950">
+                          <a:solidFill>
+                            <a:srgbClr val="1E1E1E"/>
+                          </a:solidFill>
+                        </a:defRPr>
+                      </a:pPr>
+                      <a:r>
+                        <a:t>既存の関西スーパーが価格訴求型の「デイリーマート」としてリニューアルされることで、周辺の価格競争が激化し、いかりスーパーの客層にも影響を及ぼす可能性があります。</a:t>
+                      </a:r>
+                    </a:p>
+                  </a:txBody>
+                  <a:tcPr/>
+                </a:tc>
+              </a:tr>
+              <a:tr h="679268">
+                <a:tc>
+                  <a:txBody>
+                    <a:bodyPr/>
+                    <a:lstStyle/>
+                    <a:p>
+                      <a:pPr>
+                        <a:defRPr sz="950">
+                          <a:solidFill>
+                            <a:srgbClr val="1E1E1E"/>
+                          </a:solidFill>
+                        </a:defRPr>
+                      </a:pPr>
+                      <a:r>
+                        <a:t>大阪府大阪市北区</a:t>
+                      </a:r>
+                    </a:p>
+                  </a:txBody>
+                  <a:tcPr>
+                    <a:solidFill>
+                      <a:srgbClr val="F5F5F5"/>
+                    </a:solidFill>
+                  </a:tcPr>
+                </a:tc>
+                <a:tc>
+                  <a:txBody>
+                    <a:bodyPr/>
+                    <a:lstStyle/>
+                    <a:p>
+                      <a:pPr>
+                        <a:defRPr sz="950">
+                          <a:solidFill>
+                            <a:srgbClr val="1E1E1E"/>
+                          </a:solidFill>
+                        </a:defRPr>
+                      </a:pPr>
+                      <a:r>
+                        <a:t>ライフコーポレーション （仮称）ライフ豊崎店</a:t>
+                      </a:r>
+                    </a:p>
+                  </a:txBody>
+                  <a:tcPr>
+                    <a:solidFill>
+                      <a:srgbClr val="F5F5F5"/>
+                    </a:solidFill>
+                  </a:tcPr>
+                </a:tc>
+                <a:tc>
+                  <a:txBody>
+                    <a:bodyPr/>
+                    <a:lstStyle/>
+                    <a:p>
+                      <a:pPr>
+                        <a:defRPr sz="950">
+                          <a:solidFill>
+                            <a:srgbClr val="1E1E1E"/>
+                          </a:solidFill>
+                        </a:defRPr>
+                      </a:pPr>
+                      <a:r>
+                        <a:t>2026年8月</a:t>
+                      </a:r>
+                    </a:p>
+                  </a:txBody>
+                  <a:tcPr>
+                    <a:solidFill>
+                      <a:srgbClr val="F5F5F5"/>
+                    </a:solidFill>
+                  </a:tcPr>
+                </a:tc>
+                <a:tc>
+                  <a:txBody>
+                    <a:bodyPr/>
+                    <a:lstStyle/>
+                    <a:p>
+                      <a:pPr>
+                        <a:defRPr sz="950">
+                          <a:solidFill>
+                            <a:srgbClr val="1E1E1E"/>
+                          </a:solidFill>
+                        </a:defRPr>
+                      </a:pPr>
+                      <a:r>
+                        <a:t>新規出店</a:t>
+                      </a:r>
+                    </a:p>
+                  </a:txBody>
+                  <a:tcPr>
+                    <a:solidFill>
+                      <a:srgbClr val="F5F5F5"/>
+                    </a:solidFill>
+                  </a:tcPr>
+                </a:tc>
+                <a:tc>
+                  <a:txBody>
+                    <a:bodyPr/>
+                    <a:lstStyle/>
+                    <a:p>
+                      <a:pPr>
+                        <a:defRPr sz="950">
+                          <a:solidFill>
+                            <a:srgbClr val="1E1E1E"/>
+                          </a:solidFill>
+                        </a:defRPr>
+                      </a:pPr>
+                      <a:r>
+                        <a:t>JR大阪店</a:t>
+                      </a:r>
+                    </a:p>
+                  </a:txBody>
+                  <a:tcPr>
+                    <a:solidFill>
+                      <a:srgbClr val="F5F5F5"/>
+                    </a:solidFill>
+                  </a:tcPr>
+                </a:tc>
+                <a:tc>
+                  <a:txBody>
+                    <a:bodyPr/>
+                    <a:lstStyle/>
+                    <a:p>
+                      <a:pPr>
+                        <a:defRPr sz="950">
+                          <a:solidFill>
+                            <a:srgbClr val="1E1E1E"/>
+                          </a:solidFill>
+                        </a:defRPr>
+                      </a:pPr>
+                      <a:r>
+                        <a:t>高</a:t>
+                      </a:r>
+                    </a:p>
+                  </a:txBody>
+                  <a:tcPr>
+                    <a:solidFill>
+                      <a:srgbClr val="F5F5F5"/>
+                    </a:solidFill>
+                  </a:tcPr>
+                </a:tc>
+                <a:tc>
+                  <a:txBody>
+                    <a:bodyPr/>
+                    <a:lstStyle/>
+                    <a:p>
+                      <a:pPr>
+                        <a:defRPr sz="950">
+                          <a:solidFill>
+                            <a:srgbClr val="1E1E1E"/>
+                          </a:solidFill>
+                        </a:defRPr>
+                      </a:pPr>
+                      <a:r>
+                        <a:t>大阪市内中心部での大手スーパーの新規出店であり、いかりJR大阪店と直接的な競合となる可能性が高いです。</a:t>
+                      </a:r>
+                    </a:p>
+                  </a:txBody>
+                  <a:tcPr>
+                    <a:solidFill>
+                      <a:srgbClr val="F5F5F5"/>
+                    </a:solidFill>
+                  </a:tcPr>
+                </a:tc>
+              </a:tr>
+              <a:tr h="679272">
+                <a:tc>
+                  <a:txBody>
+                    <a:bodyPr/>
+                    <a:lstStyle/>
+                    <a:p>
+                      <a:pPr>
+                        <a:defRPr sz="950">
+                          <a:solidFill>
+                            <a:srgbClr val="1E1E1E"/>
+                          </a:solidFill>
+                        </a:defRPr>
+                      </a:pPr>
+                      <a:r>
+                        <a:t>大阪府高槻市</a:t>
+                      </a:r>
+                    </a:p>
+                  </a:txBody>
+                  <a:tcPr/>
+                </a:tc>
+                <a:tc>
+                  <a:txBody>
+                    <a:bodyPr/>
+                    <a:lstStyle/>
+                    <a:p>
+                      <a:pPr>
+                        <a:defRPr sz="950">
+                          <a:solidFill>
+                            <a:srgbClr val="1E1E1E"/>
+                          </a:solidFill>
+                        </a:defRPr>
+                      </a:pPr>
+                      <a:r>
+                        <a:t>バーガーキング 関西スーパー西冠店</a:t>
+                      </a:r>
+                    </a:p>
+                  </a:txBody>
+                  <a:tcPr/>
+                </a:tc>
+                <a:tc>
+                  <a:txBody>
+                    <a:bodyPr/>
+                    <a:lstStyle/>
+                    <a:p>
+                      <a:pPr>
+                        <a:defRPr sz="950">
+                          <a:solidFill>
+                            <a:srgbClr val="1E1E1E"/>
+                          </a:solidFill>
+                        </a:defRPr>
+                      </a:pPr>
+                      <a:r>
+                        <a:t>2026年6月30日</a:t>
+                      </a:r>
+                    </a:p>
+                  </a:txBody>
+                  <a:tcPr/>
+                </a:tc>
+                <a:tc>
+                  <a:txBody>
+                    <a:bodyPr/>
+                    <a:lstStyle/>
+                    <a:p>
+                      <a:pPr>
+                        <a:defRPr sz="950">
+                          <a:solidFill>
+                            <a:srgbClr val="1E1E1E"/>
+                          </a:solidFill>
+                        </a:defRPr>
+                      </a:pPr>
+                      <a:r>
+                        <a:t>新規出店（関西スーパーに併設）</a:t>
+                      </a:r>
+                    </a:p>
+                  </a:txBody>
+                  <a:tcPr/>
+                </a:tc>
+                <a:tc>
+                  <a:txBody>
+                    <a:bodyPr/>
+                    <a:lstStyle/>
+                    <a:p>
+                      <a:pPr>
+                        <a:defRPr sz="950">
+                          <a:solidFill>
+                            <a:srgbClr val="1E1E1E"/>
+                          </a:solidFill>
+                        </a:defRPr>
+                      </a:pPr>
+                      <a:r>
+                        <a:t>高槻店</a:t>
+                      </a:r>
+                    </a:p>
+                  </a:txBody>
+                  <a:tcPr/>
+                </a:tc>
+                <a:tc>
+                  <a:txBody>
+                    <a:bodyPr/>
+                    <a:lstStyle/>
+                    <a:p>
+                      <a:pPr>
+                        <a:defRPr sz="950">
+                          <a:solidFill>
+                            <a:srgbClr val="1E1E1E"/>
+                          </a:solidFill>
+                        </a:defRPr>
+                      </a:pPr>
+                      <a:r>
+                        <a:t>低</a:t>
+                      </a:r>
+                    </a:p>
+                  </a:txBody>
+                  <a:tcPr/>
+                </a:tc>
+                <a:tc>
+                  <a:txBody>
+                    <a:bodyPr/>
+                    <a:lstStyle/>
+                    <a:p>
+                      <a:pPr>
+                        <a:defRPr sz="950">
+                          <a:solidFill>
+                            <a:srgbClr val="1E1E1E"/>
+                          </a:solidFill>
+                        </a:defRPr>
+                      </a:pPr>
+                      <a:r>
+                        <a:t>スーパーマーケット内または併設の飲食店ですが、関西スーパーの集客力向上に繋がり、間接的にいかり高槻店に影響を与える可能性があります。</a:t>
+                      </a:r>
+                    </a:p>
+                  </a:txBody>
+                  <a:tcPr/>
                 </a:tc>
               </a:tr>
             </a:tbl>
@@ -4059,94 +4508,368 @@
               </a:defRPr>
             </a:pPr>
             <a:r>
-              <a:t>c) 【地図的分析】</a:t>
-            </a:r>
-          </a:p>
-        </p:txBody>
-      </p:sp>
-      <p:sp>
-        <p:nvSpPr>
-          <p:cNvPr id="3" name="TextBox 2"/>
-          <p:cNvSpPr txBox="1"/>
+              <a:t>b) 【詳細】 (2ページ目)</a:t>
+            </a:r>
+          </a:p>
+        </p:txBody>
+      </p:sp>
+      <p:graphicFrame>
+        <p:nvGraphicFramePr>
+          <p:cNvPr id="3" name="Table 2"/>
+          <p:cNvGraphicFramePr>
+            <a:graphicFrameLocks noGrp="1"/>
+          </p:cNvGraphicFramePr>
           <p:nvPr/>
-        </p:nvSpPr>
-        <p:spPr>
-          <a:xfrm>
-            <a:off x="685800" y="1280160"/>
-            <a:ext cx="10817352" cy="4846320"/>
-          </a:xfrm>
-          <a:prstGeom prst="rect">
-            <a:avLst/>
-          </a:prstGeom>
-          <a:noFill/>
-        </p:spPr>
-        <p:txBody>
-          <a:bodyPr wrap="square">
-            <a:spAutoFit/>
-          </a:bodyPr>
-          <a:lstStyle/>
-          <a:p>
-            <a:pPr>
-              <a:spcAft>
-                <a:spcPts val="1400"/>
-              </a:spcAft>
-              <a:defRPr sz="1400">
-                <a:solidFill>
-                  <a:srgbClr val="1E1E1E"/>
-                </a:solidFill>
-              </a:defRPr>
-            </a:pPr>
-            <a:r>
-              <a:t>今回判明した競合動向は、いかりスーパーの既存店舗が集中する阪神間エリアにおいて、多方向からの競争激化を示唆しています。</a:t>
-            </a:r>
-          </a:p>
-          <a:p>
-            <a:pPr>
-              <a:spcAft>
-                <a:spcPts val="1400"/>
-              </a:spcAft>
-              <a:defRPr sz="1400">
-                <a:solidFill>
-                  <a:srgbClr val="1E1E1E"/>
-                </a:solidFill>
-              </a:defRPr>
-            </a:pPr>
-            <a:r>
-              <a:t>*   **ライフ本山店のリニューアル（神戸市東灘区）：** いかりスーパーは東灘区に岡本店、御影店、摂津本山駅前店と3店舗を展開しており、高級スーパーとしての地位を確立しています。ライフ本山店はこれらのいかり店舗と近接しており、大規模改装による品揃え強化やサービス拡充は、既存顧客の流出に直結する強い競争圧力となります。特に本山エリアは富裕層が多く、食へのこだわりが強い顧客が多いため、いかりスーパーの主要顧客層と直接競合するでしょう。</a:t>
-            </a:r>
-          </a:p>
-          <a:p>
-            <a:pPr>
-              <a:spcAft>
-                <a:spcPts val="1400"/>
-              </a:spcAft>
-              <a:defRPr sz="1400">
-                <a:solidFill>
-                  <a:srgbClr val="1E1E1E"/>
-                </a:solidFill>
-              </a:defRPr>
-            </a:pPr>
-            <a:r>
-              <a:t>*   **万代の大阪市中央区新規出店：** 大阪市中央区は南海なんば店がいかりスーパーの拠点となっています。万代の新規出店は、具体的な場所が未定ながらも「既存のスーパーが少ないエリア」を狙うとしており、いかりがカバーしきれていない、あるいは潜在的な需要があるエリアを万代が確保する可能性があります。都心部に位置するJR大阪店にも間接的に影響が及ぶことも考えられ、都市型スーパーとしての競争環境が変化する可能性があります。</a:t>
-            </a:r>
-          </a:p>
-          <a:p>
-            <a:pPr>
-              <a:spcAft>
-                <a:spcPts val="1400"/>
-              </a:spcAft>
-              <a:defRPr sz="1400">
-                <a:solidFill>
-                  <a:srgbClr val="1E1E1E"/>
-                </a:solidFill>
-              </a:defRPr>
-            </a:pPr>
-            <a:r>
-              <a:t>*   **食品館アプロの兵庫県川西市新業態店：** 川西市は、いかり宝塚店、阪急逆瀬川店、阪急伊丹店、箕面店といった北摂・阪神間の店舗が周辺に位置します。アプロの新業態店が「体験型」や「地元の食材」を重視し「ファミリー層」をターゲットとすることは、いかりが提供する高級食材やこだわりの品とは異なるものの、食への意識が高い顧客層への新たなアプローチとなり得ます。いかりの顧客層と一部重なる可能性があり、地域の食の選択肢を広げることで、顧客の分散を招く可能性があります。</a:t>
-            </a:r>
-          </a:p>
-        </p:txBody>
-      </p:sp>
+        </p:nvGraphicFramePr>
+        <p:xfrm>
+          <a:off x="685800" y="1280160"/>
+          <a:ext cx="10817352" cy="4754880"/>
+        </p:xfrm>
+        <a:graphic>
+          <a:graphicData uri="http://schemas.openxmlformats.org/drawingml/2006/table">
+            <a:tbl>
+              <a:tblPr firstRow="1" bandRow="1">
+                <a:tableStyleId>{5C22544A-7EE6-4342-B048-85BDC9FD1C3A}</a:tableStyleId>
+              </a:tblPr>
+              <a:tblGrid>
+                <a:gridCol w="914400"/>
+                <a:gridCol w="1645920"/>
+                <a:gridCol w="914400"/>
+                <a:gridCol w="914400"/>
+                <a:gridCol w="1371600"/>
+                <a:gridCol w="914400"/>
+                <a:gridCol w="4142232"/>
+              </a:tblGrid>
+              <a:tr h="2377440">
+                <a:tc>
+                  <a:txBody>
+                    <a:bodyPr/>
+                    <a:lstStyle/>
+                    <a:p>
+                      <a:pPr algn="ctr">
+                        <a:defRPr b="1" sz="1100">
+                          <a:solidFill>
+                            <a:srgbClr val="FFFFFF"/>
+                          </a:solidFill>
+                        </a:defRPr>
+                      </a:pPr>
+                      <a:r>
+                        <a:t>エリア</a:t>
+                      </a:r>
+                    </a:p>
+                  </a:txBody>
+                  <a:tcPr>
+                    <a:solidFill>
+                      <a:srgbClr val="005BAC"/>
+                    </a:solidFill>
+                  </a:tcPr>
+                </a:tc>
+                <a:tc>
+                  <a:txBody>
+                    <a:bodyPr/>
+                    <a:lstStyle/>
+                    <a:p>
+                      <a:pPr algn="ctr">
+                        <a:defRPr b="1" sz="1100">
+                          <a:solidFill>
+                            <a:srgbClr val="FFFFFF"/>
+                          </a:solidFill>
+                        </a:defRPr>
+                      </a:pPr>
+                      <a:r>
+                        <a:t>競合店舗名</a:t>
+                      </a:r>
+                    </a:p>
+                  </a:txBody>
+                  <a:tcPr>
+                    <a:solidFill>
+                      <a:srgbClr val="005BAC"/>
+                    </a:solidFill>
+                  </a:tcPr>
+                </a:tc>
+                <a:tc>
+                  <a:txBody>
+                    <a:bodyPr/>
+                    <a:lstStyle/>
+                    <a:p>
+                      <a:pPr algn="ctr">
+                        <a:defRPr b="1" sz="1100">
+                          <a:solidFill>
+                            <a:srgbClr val="FFFFFF"/>
+                          </a:solidFill>
+                        </a:defRPr>
+                      </a:pPr>
+                      <a:r>
+                        <a:t>時期</a:t>
+                      </a:r>
+                    </a:p>
+                  </a:txBody>
+                  <a:tcPr>
+                    <a:solidFill>
+                      <a:srgbClr val="005BAC"/>
+                    </a:solidFill>
+                  </a:tcPr>
+                </a:tc>
+                <a:tc>
+                  <a:txBody>
+                    <a:bodyPr/>
+                    <a:lstStyle/>
+                    <a:p>
+                      <a:pPr algn="ctr">
+                        <a:defRPr b="1" sz="1100">
+                          <a:solidFill>
+                            <a:srgbClr val="FFFFFF"/>
+                          </a:solidFill>
+                        </a:defRPr>
+                      </a:pPr>
+                      <a:r>
+                        <a:t>状態</a:t>
+                      </a:r>
+                    </a:p>
+                  </a:txBody>
+                  <a:tcPr>
+                    <a:solidFill>
+                      <a:srgbClr val="005BAC"/>
+                    </a:solidFill>
+                  </a:tcPr>
+                </a:tc>
+                <a:tc>
+                  <a:txBody>
+                    <a:bodyPr/>
+                    <a:lstStyle/>
+                    <a:p>
+                      <a:pPr algn="ctr">
+                        <a:defRPr b="1" sz="1100">
+                          <a:solidFill>
+                            <a:srgbClr val="FFFFFF"/>
+                          </a:solidFill>
+                        </a:defRPr>
+                      </a:pPr>
+                      <a:r>
+                        <a:t>影響店舗</a:t>
+                      </a:r>
+                    </a:p>
+                  </a:txBody>
+                  <a:tcPr>
+                    <a:solidFill>
+                      <a:srgbClr val="005BAC"/>
+                    </a:solidFill>
+                  </a:tcPr>
+                </a:tc>
+                <a:tc>
+                  <a:txBody>
+                    <a:bodyPr/>
+                    <a:lstStyle/>
+                    <a:p>
+                      <a:pPr algn="ctr">
+                        <a:defRPr b="1" sz="1100">
+                          <a:solidFill>
+                            <a:srgbClr val="FFFFFF"/>
+                          </a:solidFill>
+                        </a:defRPr>
+                      </a:pPr>
+                      <a:r>
+                        <a:t>影響レベル</a:t>
+                      </a:r>
+                    </a:p>
+                  </a:txBody>
+                  <a:tcPr>
+                    <a:solidFill>
+                      <a:srgbClr val="005BAC"/>
+                    </a:solidFill>
+                  </a:tcPr>
+                </a:tc>
+                <a:tc>
+                  <a:txBody>
+                    <a:bodyPr/>
+                    <a:lstStyle/>
+                    <a:p>
+                      <a:pPr algn="ctr">
+                        <a:defRPr b="1" sz="1100">
+                          <a:solidFill>
+                            <a:srgbClr val="FFFFFF"/>
+                          </a:solidFill>
+                        </a:defRPr>
+                      </a:pPr>
+                      <a:r>
+                        <a:t>詳細説明</a:t>
+                      </a:r>
+                    </a:p>
+                  </a:txBody>
+                  <a:tcPr>
+                    <a:solidFill>
+                      <a:srgbClr val="005BAC"/>
+                    </a:solidFill>
+                  </a:tcPr>
+                </a:tc>
+              </a:tr>
+              <a:tr h="2377440">
+                <a:tc>
+                  <a:txBody>
+                    <a:bodyPr/>
+                    <a:lstStyle/>
+                    <a:p>
+                      <a:pPr>
+                        <a:defRPr sz="950">
+                          <a:solidFill>
+                            <a:srgbClr val="1E1E1E"/>
+                          </a:solidFill>
+                        </a:defRPr>
+                      </a:pPr>
+                      <a:r>
+                        <a:t>兵庫県神戸市</a:t>
+                      </a:r>
+                    </a:p>
+                  </a:txBody>
+                  <a:tcPr>
+                    <a:solidFill>
+                      <a:srgbClr val="F5F5F5"/>
+                    </a:solidFill>
+                  </a:tcPr>
+                </a:tc>
+                <a:tc>
+                  <a:txBody>
+                    <a:bodyPr/>
+                    <a:lstStyle/>
+                    <a:p>
+                      <a:pPr>
+                        <a:defRPr sz="950">
+                          <a:solidFill>
+                            <a:srgbClr val="1E1E1E"/>
+                          </a:solidFill>
+                        </a:defRPr>
+                      </a:pPr>
+                      <a:r>
+                        <a:t>バーガーキング 関西スーパー琵琶店</a:t>
+                      </a:r>
+                    </a:p>
+                  </a:txBody>
+                  <a:tcPr>
+                    <a:solidFill>
+                      <a:srgbClr val="F5F5F5"/>
+                    </a:solidFill>
+                  </a:tcPr>
+                </a:tc>
+                <a:tc>
+                  <a:txBody>
+                    <a:bodyPr/>
+                    <a:lstStyle/>
+                    <a:p>
+                      <a:pPr>
+                        <a:defRPr sz="950">
+                          <a:solidFill>
+                            <a:srgbClr val="1E1E1E"/>
+                          </a:solidFill>
+                        </a:defRPr>
+                      </a:pPr>
+                      <a:r>
+                        <a:t>2026年6月30日</a:t>
+                      </a:r>
+                    </a:p>
+                  </a:txBody>
+                  <a:tcPr>
+                    <a:solidFill>
+                      <a:srgbClr val="F5F5F5"/>
+                    </a:solidFill>
+                  </a:tcPr>
+                </a:tc>
+                <a:tc>
+                  <a:txBody>
+                    <a:bodyPr/>
+                    <a:lstStyle/>
+                    <a:p>
+                      <a:pPr>
+                        <a:defRPr sz="950">
+                          <a:solidFill>
+                            <a:srgbClr val="1E1E1E"/>
+                          </a:solidFill>
+                        </a:defRPr>
+                      </a:pPr>
+                      <a:r>
+                        <a:t>新規出店（関西スーパーに併設）</a:t>
+                      </a:r>
+                    </a:p>
+                  </a:txBody>
+                  <a:tcPr>
+                    <a:solidFill>
+                      <a:srgbClr val="F5F5F5"/>
+                    </a:solidFill>
+                  </a:tcPr>
+                </a:tc>
+                <a:tc>
+                  <a:txBody>
+                    <a:bodyPr/>
+                    <a:lstStyle/>
+                    <a:p>
+                      <a:pPr>
+                        <a:defRPr sz="950">
+                          <a:solidFill>
+                            <a:srgbClr val="1E1E1E"/>
+                          </a:solidFill>
+                        </a:defRPr>
+                      </a:pPr>
+                      <a:r>
+                        <a:t>六甲店、御影店、神戸三宮店、摂津本山駅前店</a:t>
+                      </a:r>
+                    </a:p>
+                  </a:txBody>
+                  <a:tcPr>
+                    <a:solidFill>
+                      <a:srgbClr val="F5F5F5"/>
+                    </a:solidFill>
+                  </a:tcPr>
+                </a:tc>
+                <a:tc>
+                  <a:txBody>
+                    <a:bodyPr/>
+                    <a:lstStyle/>
+                    <a:p>
+                      <a:pPr>
+                        <a:defRPr sz="950">
+                          <a:solidFill>
+                            <a:srgbClr val="1E1E1E"/>
+                          </a:solidFill>
+                        </a:defRPr>
+                      </a:pPr>
+                      <a:r>
+                        <a:t>低</a:t>
+                      </a:r>
+                    </a:p>
+                  </a:txBody>
+                  <a:tcPr>
+                    <a:solidFill>
+                      <a:srgbClr val="F5F5F5"/>
+                    </a:solidFill>
+                  </a:tcPr>
+                </a:tc>
+                <a:tc>
+                  <a:txBody>
+                    <a:bodyPr/>
+                    <a:lstStyle/>
+                    <a:p>
+                      <a:pPr>
+                        <a:defRPr sz="950">
+                          <a:solidFill>
+                            <a:srgbClr val="1E1E1E"/>
+                          </a:solidFill>
+                        </a:defRPr>
+                      </a:pPr>
+                      <a:r>
+                        <a:t>同上。関西スーパーの複合施設化による集客力向上が、周辺のいかり店舗にも間接的な影響を与える可能性があります。</a:t>
+                      </a:r>
+                    </a:p>
+                  </a:txBody>
+                  <a:tcPr>
+                    <a:solidFill>
+                      <a:srgbClr val="F5F5F5"/>
+                    </a:solidFill>
+                  </a:tcPr>
+                </a:tc>
+              </a:tr>
+            </a:tbl>
+          </a:graphicData>
+        </a:graphic>
+      </p:graphicFrame>
     </p:spTree>
   </p:cSld>
   <p:clrMapOvr>
@@ -4195,7 +4918,7 @@
               </a:defRPr>
             </a:pPr>
             <a:r>
-              <a:t>d) 【影響分析】</a:t>
+              <a:t>c) 【地図的分析】</a:t>
             </a:r>
           </a:p>
         </p:txBody>
@@ -4224,76 +4947,91 @@
           <a:p>
             <a:pPr>
               <a:spcAft>
-                <a:spcPts val="1200"/>
+                <a:spcPts val="1400"/>
               </a:spcAft>
-              <a:defRPr sz="1350">
+              <a:defRPr sz="1400">
                 <a:solidFill>
                   <a:srgbClr val="1E1E1E"/>
                 </a:solidFill>
               </a:defRPr>
             </a:pPr>
             <a:r>
-              <a:t>今回判明した競合動向は、いかりスーパーの経営戦略において、特に以下の点で影響を及ぼすと予測されます。</a:t>
+              <a:t>今回の調査で判明した新規出店・改装動向は、大阪府内、特に大阪市北東部から高槻市にかけてのエリアに集中しています。</a:t>
             </a:r>
           </a:p>
           <a:p>
             <a:pPr>
               <a:spcAft>
-                <a:spcPts val="1200"/>
+                <a:spcPts val="1400"/>
               </a:spcAft>
-              <a:defRPr sz="1350">
+              <a:defRPr sz="1400">
                 <a:solidFill>
                   <a:srgbClr val="1E1E1E"/>
                 </a:solidFill>
               </a:defRPr>
             </a:pPr>
             <a:r>
-              <a:t>*   **神戸市東灘区での顧客維持戦略の強化：** ライフ本山店の大規模リニューアルは、いかり岡本店、御影店、摂津本山駅前店の売上に直接的な影響を与える可能性が高いです。特に、ライフが「生鮮食品の品揃え強化」や「デリバリーサービス拡充」を掲げていることから、いかりはこれらに対抗する独自の強み（例えば、高品質なプライベートブランド商品、希少性の高い食材、個別対応の強化、よりパーソナルなデリバリー体験など）を明確にし、顧客ロイヤルティを高める施策を早急に講じる必要があります。</a:t>
+              <a:t>*   **オーケー高槻赤大路店**の新規出店は、いかり高槻店に近い位置にあり、直接的な商圏の競合が予想されます。</a:t>
             </a:r>
           </a:p>
           <a:p>
             <a:pPr>
               <a:spcAft>
-                <a:spcPts val="1200"/>
+                <a:spcPts val="1400"/>
               </a:spcAft>
-              <a:defRPr sz="1350">
+              <a:defRPr sz="1400">
                 <a:solidFill>
                   <a:srgbClr val="1E1E1E"/>
                 </a:solidFill>
               </a:defRPr>
             </a:pPr>
             <a:r>
-              <a:t>*   **大阪都心部における潜在顧客層の奪い合い：** 万代の大阪市中央区への新規出店は、特に南海なんば店の商圏に影響を与える可能性があります。万代が「既存のスーパーが少ないエリア」を狙うということは、いかりが未開拓の、あるいはまだ十分にアプローチできていない顧客層を万代が獲得するリスクがあることを意味します。いかりとしては、都心部の店舗において、いかりならではの利便性や特別感をどのように提供できるか、改めて戦略を練る必要があるでしょう。</a:t>
+              <a:t>*   **オーケー長吉店**および**（仮称）オーケー下新庄店**は、いかりJR大阪店や南海なんば店、豊中店、王子店といった大阪市北部から東部にかけてのいかり店舗から一定の距離にはあるものの、広域での顧客獲得競争に繋がり、これらの店舗の集客に影響を与える可能性があります。</a:t>
             </a:r>
           </a:p>
           <a:p>
             <a:pPr>
               <a:spcAft>
-                <a:spcPts val="1200"/>
+                <a:spcPts val="1400"/>
               </a:spcAft>
-              <a:defRPr sz="1350">
+              <a:defRPr sz="1400">
                 <a:solidFill>
                   <a:srgbClr val="1E1E1E"/>
                 </a:solidFill>
               </a:defRPr>
             </a:pPr>
             <a:r>
-              <a:t>*   **北摂・阪神間における「食体験」の多様化への対応：** 食品館アプロの川西市における新業態店は、いかりの宝塚店、阪急逆瀬川店、阪急伊丹店、箕面店といった周辺店舗の顧客層に影響を与える可能性があります。「体験型」や「地元の食材」への注力は、食に対する新たな価値観を提案するものであり、いかりが提供する「高品質・高級志向」とは異なるが共存しうる顧客ニーズに応えるものです。いかりも、単なる商品提供に留まらない「食の楽しみ」や「体験」を提供するイベントやサービスを検討することで、顧客の囲い込みを図る必要があるかもしれません。</a:t>
+              <a:t>*   **関西スーパー デイリーマート西郷店**は、いかり王子店から比較的近い守口市に位置しており、業態転換による価格競争の激化は、近隣のいかり店舗の客層にも影響を及ぼすでしょう。</a:t>
             </a:r>
           </a:p>
           <a:p>
             <a:pPr>
               <a:spcAft>
-                <a:spcPts val="1200"/>
+                <a:spcPts val="1400"/>
               </a:spcAft>
-              <a:defRPr sz="1350">
+              <a:defRPr sz="1400">
                 <a:solidFill>
                   <a:srgbClr val="1E1E1E"/>
                 </a:solidFill>
               </a:defRPr>
             </a:pPr>
             <a:r>
-              <a:t>*   **関西エリア全体の競争環境の複雑化：** 今回の動向は、いかりスーパーが活動する関西エリア全体で、既存の有力競合がさらに質を高める動き、中堅競合が新たな地域や形態で攻勢をかける動きが同時に進行していることを示しています。いかりとしては、高級スーパーとしてのブランド価値を維持しつつ、各地域の特性と競合の動向をきめ細かく分析し、柔軟かつスピーディーな戦略調整が求められます。</a:t>
+              <a:t>*   **ライフコーポレーション（仮称）ライフ豊崎店**の新規出店は、いかりJR大阪店から非常に近い大阪市北区にあり、激しい競合が予想されます。</a:t>
+            </a:r>
+          </a:p>
+          <a:p>
+            <a:pPr>
+              <a:spcAft>
+                <a:spcPts val="1400"/>
+              </a:spcAft>
+              <a:defRPr sz="1400">
+                <a:solidFill>
+                  <a:srgbClr val="1E1E1E"/>
+                </a:solidFill>
+              </a:defRPr>
+            </a:pPr>
+            <a:r>
+              <a:t>*   **バーガーキングの関西スーパー併設店**は、高槻市と神戸市にそれぞれ位置しており、これらの関西スーパーが食の選択肢を増やすことで、周辺のいかり店舗の間接的な競合となる可能性があります。</a:t>
             </a:r>
           </a:p>
         </p:txBody>
@@ -4346,7 +5084,7 @@
               </a:defRPr>
             </a:pPr>
             <a:r>
-              <a:t>e) 【参照ソース】</a:t>
+              <a:t>d) 【影響分析】</a:t>
             </a:r>
           </a:p>
         </p:txBody>
@@ -4375,97 +5113,36 @@
           <a:p>
             <a:pPr>
               <a:spcAft>
-                <a:spcPts val="800"/>
+                <a:spcPts val="1200"/>
               </a:spcAft>
+              <a:defRPr sz="1350">
+                <a:solidFill>
+                  <a:srgbClr val="1E1E1E"/>
+                </a:solidFill>
+              </a:defRPr>
             </a:pPr>
             <a:r>
-              <a:rPr sz="1200">
-                <a:solidFill>
-                  <a:srgbClr val="1E1E1E"/>
-                </a:solidFill>
-              </a:rPr>
-              <a:t>・ </a:t>
-            </a:r>
-            <a:r>
-              <a:rPr sz="1200">
-                <a:solidFill>
-                  <a:srgbClr val="1E1E1E"/>
-                </a:solidFill>
-              </a:rPr>
-              <a:t>  </a:t>
-            </a:r>
-            <a:r>
-              <a:rPr sz="1200" u="sng">
-                <a:solidFill>
-                  <a:srgbClr val="0066CC"/>
-                </a:solidFill>
-                <a:hlinkClick r:id="rId2"/>
-              </a:rPr>
-              <a:t>ライフ本山店、2026年秋にリニューアルオープンへ。新たな顧客体験の提供を目指す</a:t>
-            </a:r>
-          </a:p>
-          <a:p>
-            <a:pPr>
-              <a:spcAft>
-                <a:spcPts val="800"/>
-              </a:spcAft>
-            </a:pPr>
-            <a:r>
-              <a:rPr sz="1200">
-                <a:solidFill>
-                  <a:srgbClr val="1E1E1E"/>
-                </a:solidFill>
-              </a:rPr>
-              <a:t>・ </a:t>
-            </a:r>
-            <a:r>
-              <a:rPr sz="1200">
-                <a:solidFill>
-                  <a:srgbClr val="1E1E1E"/>
-                </a:solidFill>
-              </a:rPr>
-              <a:t>  </a:t>
-            </a:r>
-            <a:r>
-              <a:rPr sz="1200" u="sng">
-                <a:solidFill>
-                  <a:srgbClr val="0066CC"/>
-                </a:solidFill>
-                <a:hlinkClick r:id="rId3"/>
-              </a:rPr>
-              <a:t>【速報】万代が大阪市内に新店舗計画。来年春のオープン目指す</a:t>
-            </a:r>
-          </a:p>
-          <a:p>
-            <a:pPr>
-              <a:spcAft>
-                <a:spcPts val="800"/>
-              </a:spcAft>
-            </a:pPr>
-            <a:r>
-              <a:rPr sz="1200">
-                <a:solidFill>
-                  <a:srgbClr val="1E1E1E"/>
-                </a:solidFill>
-              </a:rPr>
-              <a:t>・ </a:t>
-            </a:r>
-            <a:r>
-              <a:rPr sz="1200">
-                <a:solidFill>
-                  <a:srgbClr val="1E1E1E"/>
-                </a:solidFill>
-              </a:rPr>
-              <a:t>  </a:t>
-            </a:r>
-            <a:r>
-              <a:rPr sz="1200" u="sng">
-                <a:solidFill>
-                  <a:srgbClr val="0066CC"/>
-                </a:solidFill>
-                <a:hlinkClick r:id="rId4"/>
-              </a:rPr>
-              <a:t>食品館アプロ、兵庫県川西市に新業態店を2027年初夏オープン予定</a:t>
+              <a:t>今回の競合動向は、いかりスーパーマーケットの関西エリア全体、特に大阪府における競争環境をさらに厳しくする可能性があります。</a:t>
+            </a:r>
+            <a:br/>
+            <a:r>
+              <a:t>まず、ディスカウントスーパーの「オーケー」が大阪府内で複数店舗の新規出店を計画している点は非常に大きな脅威です。特に「高槻赤大路店」はいかり高槻店と直接競合し、高級志向のいかりスーパーの顧客層の一部が価格訴求力の高いオーケーに流れる可能性があります。また、長吉店や下新庄店も大阪府内でのオーケーの勢力拡大を意味し、いかりの広域的なブランドイメージや顧客基盤に影響を及ぼす可能性があります。</a:t>
+            </a:r>
+            <a:br/>
+            <a:r>
+              <a:t>次に、「関西スーパー」が「デイリーマート」業態への転換を進めている点も注目です。守口市の西郷店がデイリーマートとしてリニューアルすることで、従来のスーパーマーケットとしての競争に加え、価格帯での競争も激化します。いかりスーパーは高品質・高付加価値戦略を採るため、価格に敏感な顧客層の取り込みは難しいかもしれませんが、デイリーマートの拡大は市場全体の価格水準を引き下げ、消費者の期待値を変化させる可能性があります。</a:t>
+            </a:r>
+            <a:br/>
+            <a:r>
+              <a:t>「ライフコーポレーション」の大阪市北区「（仮称）ライフ豊崎店」の新規出店は、いかりJR大阪店にとって直接的な競合となるでしょう。都市部の利便性の高い立地での競争が激化し、顧客の囲い込みがより重要になります。</a:t>
+            </a:r>
+            <a:br/>
+            <a:r>
+              <a:t>バーガーキングの関西スーパー併設は直接的な食品スーパーの競合ではありませんが、スーパーマーケットが食の複合施設化を進める動きとして捉えられます。これにより、関西スーパーの来店動機が増え、滞在時間も長くなることで、周辺のいかり店舗の集客に間接的な影響を与える可能性があります。</a:t>
+            </a:r>
+            <a:br/>
+            <a:r>
+              <a:t>これらの動向は、いかりスーパーがこれまで培ってきた高品質・高価格帯のポジショニングを再確認し、より一層の顧客体験価値向上や、品揃えの差別化、そしてロイヤリティプログラムの強化といった戦略が求められることを示唆しています。特に、都市部や人口密集地におけるディスカウントスーパーの台頭に対し、いかにいかりの「価値」を顧客に訴求し続けるかが重要となります。</a:t>
             </a:r>
           </a:p>
         </p:txBody>
@@ -4479,6 +5156,306 @@
 </file>
 
 <file path=ppt/slides/slide7.xml><?xml version="1.0" encoding="utf-8"?>
+<p:sld xmlns:a="http://schemas.openxmlformats.org/drawingml/2006/main" xmlns:p="http://schemas.openxmlformats.org/presentationml/2006/main" xmlns:r="http://schemas.openxmlformats.org/officeDocument/2006/relationships">
+  <p:cSld>
+    <p:spTree>
+      <p:nvGrpSpPr>
+        <p:cNvPr id="1" name=""/>
+        <p:cNvGrpSpPr/>
+        <p:nvPr/>
+      </p:nvGrpSpPr>
+      <p:grpSpPr/>
+      <p:sp>
+        <p:nvSpPr>
+          <p:cNvPr id="2" name="TextBox 1"/>
+          <p:cNvSpPr txBox="1"/>
+          <p:nvPr/>
+        </p:nvSpPr>
+        <p:spPr>
+          <a:xfrm>
+            <a:off x="685800" y="457200"/>
+            <a:ext cx="10817352" cy="731520"/>
+          </a:xfrm>
+          <a:prstGeom prst="rect">
+            <a:avLst/>
+          </a:prstGeom>
+          <a:noFill/>
+        </p:spPr>
+        <p:txBody>
+          <a:bodyPr wrap="square">
+            <a:spAutoFit/>
+          </a:bodyPr>
+          <a:lstStyle/>
+          <a:p>
+            <a:pPr>
+              <a:defRPr b="1" sz="2800">
+                <a:solidFill>
+                  <a:srgbClr val="005BAC"/>
+                </a:solidFill>
+              </a:defRPr>
+            </a:pPr>
+            <a:r>
+              <a:t>e) 【参照ソース】</a:t>
+            </a:r>
+          </a:p>
+        </p:txBody>
+      </p:sp>
+      <p:sp>
+        <p:nvSpPr>
+          <p:cNvPr id="3" name="TextBox 2"/>
+          <p:cNvSpPr txBox="1"/>
+          <p:nvPr/>
+        </p:nvSpPr>
+        <p:spPr>
+          <a:xfrm>
+            <a:off x="685800" y="1280160"/>
+            <a:ext cx="10817352" cy="4846320"/>
+          </a:xfrm>
+          <a:prstGeom prst="rect">
+            <a:avLst/>
+          </a:prstGeom>
+          <a:noFill/>
+        </p:spPr>
+        <p:txBody>
+          <a:bodyPr wrap="square">
+            <a:spAutoFit/>
+          </a:bodyPr>
+          <a:lstStyle/>
+          <a:p>
+            <a:pPr>
+              <a:spcAft>
+                <a:spcPts val="800"/>
+              </a:spcAft>
+            </a:pPr>
+            <a:r>
+              <a:rPr sz="1200">
+                <a:solidFill>
+                  <a:srgbClr val="1E1E1E"/>
+                </a:solidFill>
+              </a:rPr>
+              <a:t>・ </a:t>
+            </a:r>
+            <a:r>
+              <a:rPr sz="1200">
+                <a:solidFill>
+                  <a:srgbClr val="1E1E1E"/>
+                </a:solidFill>
+              </a:rPr>
+              <a:t>  </a:t>
+            </a:r>
+            <a:r>
+              <a:rPr sz="1200" u="sng">
+                <a:solidFill>
+                  <a:srgbClr val="0066CC"/>
+                </a:solidFill>
+                <a:hlinkClick r:id="rId2"/>
+              </a:rPr>
+              <a:t>オーケーnews｜4月5月で関西に4店舗を出店/計11店舗体制 流通スーパーニュース</a:t>
+            </a:r>
+          </a:p>
+          <a:p>
+            <a:pPr>
+              <a:spcAft>
+                <a:spcPts val="800"/>
+              </a:spcAft>
+            </a:pPr>
+            <a:r>
+              <a:rPr sz="1200">
+                <a:solidFill>
+                  <a:srgbClr val="1E1E1E"/>
+                </a:solidFill>
+              </a:rPr>
+              <a:t>・ </a:t>
+            </a:r>
+            <a:r>
+              <a:rPr sz="1200">
+                <a:solidFill>
+                  <a:srgbClr val="1E1E1E"/>
+                </a:solidFill>
+              </a:rPr>
+              <a:t>  </a:t>
+            </a:r>
+            <a:r>
+              <a:rPr sz="1200" u="sng">
+                <a:solidFill>
+                  <a:srgbClr val="0066CC"/>
+                </a:solidFill>
+                <a:hlinkClick r:id="rId3"/>
+              </a:rPr>
+              <a:t>ディスカウント・スーパーマーケット「オーケー南津守店（関西8号店）」2026年4月15日(水)、 「オーケー今川店（関西9号店）」 2026年4月22日(水) 連続出店！ ～2026年は大阪府での展開を加速します！～ \|</a:t>
+            </a:r>
+          </a:p>
+          <a:p>
+            <a:pPr>
+              <a:spcAft>
+                <a:spcPts val="800"/>
+              </a:spcAft>
+            </a:pPr>
+            <a:r>
+              <a:rPr sz="1200">
+                <a:solidFill>
+                  <a:srgbClr val="1E1E1E"/>
+                </a:solidFill>
+              </a:rPr>
+              <a:t>・ </a:t>
+            </a:r>
+            <a:r>
+              <a:rPr sz="1200">
+                <a:solidFill>
+                  <a:srgbClr val="1E1E1E"/>
+                </a:solidFill>
+              </a:rPr>
+              <a:t>  </a:t>
+            </a:r>
+            <a:r>
+              <a:rPr sz="1200" u="sng">
+                <a:solidFill>
+                  <a:srgbClr val="0066CC"/>
+                </a:solidFill>
+                <a:hlinkClick r:id="rId4"/>
+              </a:rPr>
+              <a:t>お知らせ｜関西スーパー～いつも暮らしの近くにいます～​</a:t>
+            </a:r>
+          </a:p>
+          <a:p>
+            <a:pPr>
+              <a:spcAft>
+                <a:spcPts val="800"/>
+              </a:spcAft>
+            </a:pPr>
+            <a:r>
+              <a:rPr sz="1200">
+                <a:solidFill>
+                  <a:srgbClr val="1E1E1E"/>
+                </a:solidFill>
+              </a:rPr>
+              <a:t>・ </a:t>
+            </a:r>
+            <a:r>
+              <a:rPr sz="1200">
+                <a:solidFill>
+                  <a:srgbClr val="1E1E1E"/>
+                </a:solidFill>
+              </a:rPr>
+              <a:t>  </a:t>
+            </a:r>
+            <a:r>
+              <a:rPr sz="1200" u="sng">
+                <a:solidFill>
+                  <a:srgbClr val="0066CC"/>
+                </a:solidFill>
+                <a:hlinkClick r:id="rId5"/>
+              </a:rPr>
+              <a:t>ディスカウント・スーパーマーケット「オーケー」 大阪府での展開を加速！5月に「大東新田西町店」「豊中穂積店」を連続出店 ～2026年度は大阪府内に計7店舗の出店を予定</a:t>
+            </a:r>
+          </a:p>
+          <a:p>
+            <a:pPr>
+              <a:spcAft>
+                <a:spcPts val="800"/>
+              </a:spcAft>
+            </a:pPr>
+            <a:r>
+              <a:rPr sz="1200">
+                <a:solidFill>
+                  <a:srgbClr val="1E1E1E"/>
+                </a:solidFill>
+              </a:rPr>
+              <a:t>・ </a:t>
+            </a:r>
+            <a:r>
+              <a:rPr sz="1200">
+                <a:solidFill>
+                  <a:srgbClr val="1E1E1E"/>
+                </a:solidFill>
+              </a:rPr>
+              <a:t>  </a:t>
+            </a:r>
+            <a:r>
+              <a:rPr sz="1200" u="sng">
+                <a:solidFill>
+                  <a:srgbClr val="0066CC"/>
+                </a:solidFill>
+                <a:hlinkClick r:id="rId6"/>
+              </a:rPr>
+              <a:t>【守口】西郷通の「関西スーパー」が6月30日から7月2日まで臨時休業。『関西スーパーデイリーマート』として7月3日にリニューアルオープン 守口・門真つーしん</a:t>
+            </a:r>
+          </a:p>
+          <a:p>
+            <a:pPr>
+              <a:spcAft>
+                <a:spcPts val="800"/>
+              </a:spcAft>
+            </a:pPr>
+            <a:r>
+              <a:rPr sz="1200">
+                <a:solidFill>
+                  <a:srgbClr val="1E1E1E"/>
+                </a:solidFill>
+              </a:rPr>
+              <a:t>・ </a:t>
+            </a:r>
+            <a:r>
+              <a:rPr sz="1200">
+                <a:solidFill>
+                  <a:srgbClr val="1E1E1E"/>
+                </a:solidFill>
+              </a:rPr>
+              <a:t>  </a:t>
+            </a:r>
+            <a:r>
+              <a:rPr sz="1200" u="sng">
+                <a:solidFill>
+                  <a:srgbClr val="0066CC"/>
+                </a:solidFill>
+                <a:hlinkClick r:id="rId7"/>
+              </a:rPr>
+              <a:t>オーケーとライフが大阪市で出店ラッシュ！クスリのアオキは高知進出へ【今週の大店立地法速報】</a:t>
+            </a:r>
+          </a:p>
+          <a:p>
+            <a:pPr>
+              <a:spcAft>
+                <a:spcPts val="800"/>
+              </a:spcAft>
+            </a:pPr>
+            <a:r>
+              <a:rPr sz="1200">
+                <a:solidFill>
+                  <a:srgbClr val="1E1E1E"/>
+                </a:solidFill>
+              </a:rPr>
+              <a:t>・ </a:t>
+            </a:r>
+            <a:r>
+              <a:rPr sz="1200">
+                <a:solidFill>
+                  <a:srgbClr val="1E1E1E"/>
+                </a:solidFill>
+              </a:rPr>
+              <a:t>  </a:t>
+            </a:r>
+            <a:r>
+              <a:rPr sz="1200" u="sng">
+                <a:solidFill>
+                  <a:srgbClr val="0066CC"/>
+                </a:solidFill>
+                <a:hlinkClick r:id="rId8"/>
+              </a:rPr>
+              <a:t>バーガーキング／6月下旬に新規9店舗オープン、宮崎県に初出店 流通ニュース</a:t>
+            </a:r>
+          </a:p>
+        </p:txBody>
+      </p:sp>
+    </p:spTree>
+  </p:cSld>
+  <p:clrMapOvr>
+    <a:masterClrMapping/>
+  </p:clrMapOvr>
+</p:sld>
+</file>
+
+<file path=ppt/slides/slide8.xml><?xml version="1.0" encoding="utf-8"?>
 <p:sld xmlns:a="http://schemas.openxmlformats.org/drawingml/2006/main" xmlns:p="http://schemas.openxmlformats.org/presentationml/2006/main" xmlns:r="http://schemas.openxmlformats.org/officeDocument/2006/relationships">
   <p:cSld>
     <p:spTree>
